--- a/email_carbon_presentation.pptx
+++ b/email_carbon_presentation.pptx
@@ -4,6 +4,9 @@
   <p:sldMasterIdLst>
     <p:sldMasterId id="2147483648" r:id="rId1"/>
   </p:sldMasterIdLst>
+  <p:notesMasterIdLst>
+    <p:notesMasterId r:id="rId15"/>
+  </p:notesMasterIdLst>
   <p:sldIdLst>
     <p:sldId id="256" r:id="rId2"/>
     <p:sldId id="257" r:id="rId3"/>
@@ -19,10 +22,7 @@
     <p:sldId id="267" r:id="rId13"/>
     <p:sldId id="268" r:id="rId14"/>
   </p:sldIdLst>
-  <p:notesMasterIdLst>
-    <p:notesMasterId r:id="rId15"/>
-  </p:notesMasterIdLst>
-  <p:sldSz cx="9144000" cy="5143500"/>
+  <p:sldSz cx="9144000" cy="5143500" type="screen16x9"/>
   <p:notesSz cx="5143500" cy="9144000"/>
   <p:defaultTextStyle>
     <a:lvl1pPr marL="0" algn="l" defTabSz="914400" rtl="0" eaLnBrk="1" latinLnBrk="0" hangingPunct="1">
@@ -116,6 +116,11 @@
       </a:defRPr>
     </a:lvl9pPr>
   </p:defaultTextStyle>
+  <p:extLst>
+    <p:ext uri="{EFAFB233-063F-42B5-8137-9DF3F51BA10A}">
+      <p15:sldGuideLst xmlns:p15="http://schemas.microsoft.com/office/powerpoint/2012/main"/>
+    </p:ext>
+  </p:extLst>
 </p:presentation>
 </file>
 
@@ -141,234 +146,10 @@
           <a:chExt cx="0" cy="0"/>
         </a:xfrm>
       </p:grpSpPr>
-      <p:sp>
-        <p:nvSpPr>
-          <p:cNvPr id="2" name="Header Placeholder 1"/>
-          <p:cNvSpPr>
-            <a:spLocks noGrp="1"/>
-          </p:cNvSpPr>
-          <p:nvPr>
-            <p:ph type="hdr" sz="quarter"/>
-          </p:nvPr>
-        </p:nvSpPr>
-        <p:spPr>
-          <a:xfrm>
-            <a:off x="0" y="0"/>
-            <a:ext cx="2971800" cy="458788"/>
-          </a:xfrm>
-          <a:prstGeom prst="rect">
-            <a:avLst/>
-          </a:prstGeom>
-        </p:spPr>
-        <p:txBody>
-          <a:bodyPr vert="horz" lIns="91440" tIns="45720" rIns="91440" bIns="45720" rtlCol="0"/>
-          <a:lstStyle>
-            <a:lvl1pPr algn="l">
-              <a:defRPr sz="1200"/>
-            </a:lvl1pPr>
-          </a:lstStyle>
-          <a:p>
-            <a:endParaRPr lang="en-US"/>
-          </a:p>
-        </p:txBody>
-      </p:sp>
-      <p:sp>
-        <p:nvSpPr>
-          <p:cNvPr id="3" name="Date Placeholder 2"/>
-          <p:cNvSpPr>
-            <a:spLocks noGrp="1"/>
-          </p:cNvSpPr>
-          <p:nvPr>
-            <p:ph type="dt" idx="1"/>
-          </p:nvPr>
-        </p:nvSpPr>
-        <p:spPr>
-          <a:xfrm>
-            <a:off x="3884613" y="0"/>
-            <a:ext cx="2971800" cy="458788"/>
-          </a:xfrm>
-          <a:prstGeom prst="rect">
-            <a:avLst/>
-          </a:prstGeom>
-        </p:spPr>
-        <p:txBody>
-          <a:bodyPr vert="horz" lIns="91440" tIns="45720" rIns="91440" bIns="45720" rtlCol="0"/>
-          <a:lstStyle>
-            <a:lvl1pPr algn="r">
-              <a:defRPr sz="1200"/>
-            </a:lvl1pPr>
-          </a:lstStyle>
-          <a:p>
-            <a:fld id="{5282F153-3F37-0F45-9E97-73ACFA13230C}" type="datetimeFigureOut">
-              <a:rPr lang="en-US"/>
-              <a:t>7/23/19</a:t>
-            </a:fld>
-            <a:endParaRPr lang="en-US"/>
-          </a:p>
-        </p:txBody>
-      </p:sp>
-      <p:sp>
-        <p:nvSpPr>
-          <p:cNvPr id="4" name="Slide Image Placeholder 3"/>
-          <p:cNvSpPr>
-            <a:spLocks noGrp="1" noRot="1" noChangeAspect="1"/>
-          </p:cNvSpPr>
-          <p:nvPr>
-            <p:ph type="sldImg" idx="2"/>
-          </p:nvPr>
-        </p:nvSpPr>
-        <p:spPr>
-          <a:xfrm>
-            <a:off x="685800" y="1143000"/>
-            <a:ext cx="5486400" cy="3086100"/>
-          </a:xfrm>
-          <a:prstGeom prst="rect">
-            <a:avLst/>
-          </a:prstGeom>
-          <a:noFill/>
-          <a:ln w="12700">
-            <a:solidFill>
-              <a:prstClr val="black"/>
-            </a:solidFill>
-          </a:ln>
-        </p:spPr>
-        <p:txBody>
-          <a:bodyPr vert="horz" lIns="91440" tIns="45720" rIns="91440" bIns="45720" rtlCol="0" anchor="ctr"/>
-          <a:lstStyle/>
-          <a:p>
-            <a:endParaRPr lang="en-US"/>
-          </a:p>
-        </p:txBody>
-      </p:sp>
-      <p:sp>
-        <p:nvSpPr>
-          <p:cNvPr id="5" name="Notes Placeholder 4"/>
-          <p:cNvSpPr>
-            <a:spLocks noGrp="1"/>
-          </p:cNvSpPr>
-          <p:nvPr>
-            <p:ph type="body" sz="quarter" idx="3"/>
-          </p:nvPr>
-        </p:nvSpPr>
-        <p:spPr>
-          <a:xfrm>
-            <a:off x="685800" y="4400550"/>
-            <a:ext cx="5486400" cy="3600450"/>
-          </a:xfrm>
-          <a:prstGeom prst="rect">
-            <a:avLst/>
-          </a:prstGeom>
-        </p:spPr>
-        <p:txBody>
-          <a:bodyPr vert="horz" lIns="91440" tIns="45720" rIns="91440" bIns="45720" rtlCol="0"/>
-          <a:lstStyle/>
-          <a:p>
-            <a:pPr lvl="0"/>
-            <a:r>
-              <a:rPr lang="en-US"/>
-              <a:t>Click to edit Master text styles</a:t>
-            </a:r>
-          </a:p>
-          <a:p>
-            <a:pPr lvl="1"/>
-            <a:r>
-              <a:rPr lang="en-US"/>
-              <a:t>Second level</a:t>
-            </a:r>
-          </a:p>
-          <a:p>
-            <a:pPr lvl="2"/>
-            <a:r>
-              <a:rPr lang="en-US"/>
-              <a:t>Third level</a:t>
-            </a:r>
-          </a:p>
-          <a:p>
-            <a:pPr lvl="3"/>
-            <a:r>
-              <a:rPr lang="en-US"/>
-              <a:t>Fourth level</a:t>
-            </a:r>
-          </a:p>
-          <a:p>
-            <a:pPr lvl="4"/>
-            <a:r>
-              <a:rPr lang="en-US"/>
-              <a:t>Fifth level</a:t>
-            </a:r>
-          </a:p>
-        </p:txBody>
-      </p:sp>
-      <p:sp>
-        <p:nvSpPr>
-          <p:cNvPr id="6" name="Footer Placeholder 5"/>
-          <p:cNvSpPr>
-            <a:spLocks noGrp="1"/>
-          </p:cNvSpPr>
-          <p:nvPr>
-            <p:ph type="ftr" sz="quarter" idx="4"/>
-          </p:nvPr>
-        </p:nvSpPr>
-        <p:spPr>
-          <a:xfrm>
-            <a:off x="0" y="8685213"/>
-            <a:ext cx="2971800" cy="458787"/>
-          </a:xfrm>
-          <a:prstGeom prst="rect">
-            <a:avLst/>
-          </a:prstGeom>
-        </p:spPr>
-        <p:txBody>
-          <a:bodyPr vert="horz" lIns="91440" tIns="45720" rIns="91440" bIns="45720" rtlCol="0" anchor="b"/>
-          <a:lstStyle>
-            <a:lvl1pPr algn="l">
-              <a:defRPr sz="1200"/>
-            </a:lvl1pPr>
-          </a:lstStyle>
-          <a:p>
-            <a:endParaRPr lang="en-US"/>
-          </a:p>
-        </p:txBody>
-      </p:sp>
-      <p:sp>
-        <p:nvSpPr>
-          <p:cNvPr id="7" name="Slide Number Placeholder 6"/>
-          <p:cNvSpPr>
-            <a:spLocks noGrp="1"/>
-          </p:cNvSpPr>
-          <p:nvPr>
-            <p:ph type="sldNum" sz="quarter" idx="5"/>
-          </p:nvPr>
-        </p:nvSpPr>
-        <p:spPr>
-          <a:xfrm>
-            <a:off x="3884613" y="8685213"/>
-            <a:ext cx="2971800" cy="458787"/>
-          </a:xfrm>
-          <a:prstGeom prst="rect">
-            <a:avLst/>
-          </a:prstGeom>
-        </p:spPr>
-        <p:txBody>
-          <a:bodyPr vert="horz" lIns="91440" tIns="45720" rIns="91440" bIns="45720" rtlCol="0" anchor="b"/>
-          <a:lstStyle>
-            <a:lvl1pPr algn="r">
-              <a:defRPr sz="1200"/>
-            </a:lvl1pPr>
-          </a:lstStyle>
-          <a:p>
-            <a:fld id="{CE5E9CC1-C706-0F49-92D6-E571CC5EEA8F}" type="slidenum">
-              <a:rPr lang="en-US"/>
-              <a:t>‹#›</a:t>
-            </a:fld>
-            <a:endParaRPr lang="en-US"/>
-          </a:p>
-        </p:txBody>
-      </p:sp>
     </p:spTree>
     <p:extLst>
       <p:ext uri="{BB962C8B-B14F-4D97-AF65-F5344CB8AC3E}">
-        <p14:creationId xmlns:p14="http://schemas.microsoft.com/office/powerpoint/2010/main" val="1024086991"/>
+        <p14:creationId xmlns:p14="http://schemas.microsoft.com/office/powerpoint/2010/main" val="3593626147"/>
       </p:ext>
     </p:extLst>
   </p:cSld>
@@ -512,10 +293,6 @@
           <a:bodyPr/>
           <a:lstStyle/>
           <a:p>
-            <a:r>
-              <a:rPr lang="en-US" dirty="0"/>
-              <a:t/>
-            </a:r>
             <a:endParaRPr lang="en-US" dirty="0"/>
           </a:p>
         </p:txBody>
@@ -600,10 +377,6 @@
           <a:bodyPr/>
           <a:lstStyle/>
           <a:p>
-            <a:r>
-              <a:rPr lang="en-US" dirty="0"/>
-              <a:t/>
-            </a:r>
             <a:endParaRPr lang="en-US" dirty="0"/>
           </a:p>
         </p:txBody>
@@ -688,10 +461,6 @@
           <a:bodyPr/>
           <a:lstStyle/>
           <a:p>
-            <a:r>
-              <a:rPr lang="en-US" dirty="0"/>
-              <a:t/>
-            </a:r>
             <a:endParaRPr lang="en-US" dirty="0"/>
           </a:p>
         </p:txBody>
@@ -776,10 +545,6 @@
           <a:bodyPr/>
           <a:lstStyle/>
           <a:p>
-            <a:r>
-              <a:rPr lang="en-US" dirty="0"/>
-              <a:t/>
-            </a:r>
             <a:endParaRPr lang="en-US" dirty="0"/>
           </a:p>
         </p:txBody>
@@ -864,10 +629,6 @@
           <a:bodyPr/>
           <a:lstStyle/>
           <a:p>
-            <a:r>
-              <a:rPr lang="en-US" dirty="0"/>
-              <a:t/>
-            </a:r>
             <a:endParaRPr lang="en-US" dirty="0"/>
           </a:p>
         </p:txBody>
@@ -952,10 +713,6 @@
           <a:bodyPr/>
           <a:lstStyle/>
           <a:p>
-            <a:r>
-              <a:rPr lang="en-US" dirty="0"/>
-              <a:t/>
-            </a:r>
             <a:endParaRPr lang="en-US" dirty="0"/>
           </a:p>
         </p:txBody>
@@ -1040,10 +797,6 @@
           <a:bodyPr/>
           <a:lstStyle/>
           <a:p>
-            <a:r>
-              <a:rPr lang="en-US" dirty="0"/>
-              <a:t/>
-            </a:r>
             <a:endParaRPr lang="en-US" dirty="0"/>
           </a:p>
         </p:txBody>
@@ -1128,10 +881,6 @@
           <a:bodyPr/>
           <a:lstStyle/>
           <a:p>
-            <a:r>
-              <a:rPr lang="en-US" dirty="0"/>
-              <a:t/>
-            </a:r>
             <a:endParaRPr lang="en-US" dirty="0"/>
           </a:p>
         </p:txBody>
@@ -1216,10 +965,6 @@
           <a:bodyPr/>
           <a:lstStyle/>
           <a:p>
-            <a:r>
-              <a:rPr lang="en-US" dirty="0"/>
-              <a:t/>
-            </a:r>
             <a:endParaRPr lang="en-US" dirty="0"/>
           </a:p>
         </p:txBody>
@@ -1304,10 +1049,6 @@
           <a:bodyPr/>
           <a:lstStyle/>
           <a:p>
-            <a:r>
-              <a:rPr lang="en-US" dirty="0"/>
-              <a:t/>
-            </a:r>
             <a:endParaRPr lang="en-US" dirty="0"/>
           </a:p>
         </p:txBody>
@@ -1392,10 +1133,6 @@
           <a:bodyPr/>
           <a:lstStyle/>
           <a:p>
-            <a:r>
-              <a:rPr lang="en-US" dirty="0"/>
-              <a:t/>
-            </a:r>
             <a:endParaRPr lang="en-US" dirty="0"/>
           </a:p>
         </p:txBody>
@@ -1480,10 +1217,6 @@
           <a:bodyPr/>
           <a:lstStyle/>
           <a:p>
-            <a:r>
-              <a:rPr lang="en-US" dirty="0"/>
-              <a:t/>
-            </a:r>
             <a:endParaRPr lang="en-US" dirty="0"/>
           </a:p>
         </p:txBody>
@@ -1568,10 +1301,6 @@
           <a:bodyPr/>
           <a:lstStyle/>
           <a:p>
-            <a:r>
-              <a:rPr lang="en-US" dirty="0"/>
-              <a:t/>
-            </a:r>
             <a:endParaRPr lang="en-US" dirty="0"/>
           </a:p>
         </p:txBody>
@@ -1645,6 +1374,11 @@
 <file path=ppt/slideMasters/slideMaster1.xml><?xml version="1.0" encoding="utf-8"?>
 <p:sldMaster xmlns:a="http://schemas.openxmlformats.org/drawingml/2006/main" xmlns:r="http://schemas.openxmlformats.org/officeDocument/2006/relationships" xmlns:p="http://schemas.openxmlformats.org/presentationml/2006/main">
   <p:cSld>
+    <p:bg>
+      <p:bgRef idx="1001">
+        <a:schemeClr val="bg1"/>
+      </p:bgRef>
+    </p:bg>
     <p:spTree>
       <p:nvGrpSpPr>
         <p:cNvPr id="1" name=""/>
@@ -1927,6 +1661,7 @@
         <a:solidFill>
           <a:srgbClr val="2C5F2D"/>
         </a:solidFill>
+        <a:effectLst/>
       </p:bgPr>
     </p:bg>
     <p:spTree>
@@ -1965,14 +1700,14 @@
       </p:sp>
       <p:pic>
         <p:nvPicPr>
-          <p:cNvPr id="3" name="Image 0" descr="preencoded.png">    </p:cNvPr>
+          <p:cNvPr id="3" name="Image 0" descr="preencoded.png"/>
           <p:cNvPicPr>
             <a:picLocks noChangeAspect="1"/>
           </p:cNvPicPr>
           <p:nvPr/>
         </p:nvPicPr>
         <p:blipFill>
-          <a:blip r:embed="rId1"/>
+          <a:blip r:embed="rId3"/>
           <a:stretch>
             <a:fillRect/>
           </a:stretch>
@@ -2008,7 +1743,7 @@
           <a:bodyPr wrap="square" rtlCol="0" anchor="ctr"/>
           <a:lstStyle/>
           <a:p>
-            <a:pPr algn="ctr" indent="0" marL="0">
+            <a:pPr marL="0" indent="0" algn="ctr">
               <a:buNone/>
             </a:pPr>
             <a:r>
@@ -2047,7 +1782,7 @@
           <a:bodyPr wrap="square" rtlCol="0" anchor="ctr"/>
           <a:lstStyle/>
           <a:p>
-            <a:pPr algn="ctr" indent="0" marL="0">
+            <a:pPr marL="0" indent="0" algn="ctr">
               <a:buNone/>
             </a:pPr>
             <a:r>
@@ -2086,7 +1821,7 @@
           <a:bodyPr wrap="square" rtlCol="0" anchor="ctr"/>
           <a:lstStyle/>
           <a:p>
-            <a:pPr algn="ctr" indent="0" marL="0">
+            <a:pPr marL="0" indent="0" algn="ctr">
               <a:buNone/>
             </a:pPr>
             <a:r>
@@ -2103,7 +1838,7 @@
             <a:endParaRPr lang="en-US" sz="1400" dirty="0"/>
           </a:p>
           <a:p>
-            <a:pPr algn="ctr" indent="0" marL="0">
+            <a:pPr marL="0" indent="0" algn="ctr">
               <a:buNone/>
             </a:pPr>
             <a:r>
@@ -2115,12 +1850,12 @@
                 <a:ea typeface="Calibri" pitchFamily="34" charset="-122"/>
                 <a:cs typeface="Calibri" pitchFamily="34" charset="-120"/>
               </a:rPr>
-              <a:t>Afia Anjum, Mahfuza Lubna Nuvia, Prof. Dr. Md. Motaharul Islam</a:t>
+              <a:t>Afia Anjum, Mahfuza Lubna Nuvia</a:t>
             </a:r>
             <a:endParaRPr lang="en-US" sz="1400" dirty="0"/>
           </a:p>
           <a:p>
-            <a:pPr algn="ctr" indent="0" marL="0">
+            <a:pPr marL="0" indent="0" algn="ctr">
               <a:buNone/>
             </a:pPr>
             <a:r>
@@ -2137,7 +1872,7 @@
             <a:endParaRPr lang="en-US" sz="1400" dirty="0"/>
           </a:p>
           <a:p>
-            <a:pPr algn="ctr" indent="0" marL="0">
+            <a:pPr marL="0" indent="0" algn="ctr">
               <a:buNone/>
             </a:pPr>
             <a:r>
@@ -2154,7 +1889,7 @@
             <a:endParaRPr lang="en-US" sz="1400" dirty="0"/>
           </a:p>
           <a:p>
-            <a:pPr algn="ctr" indent="0" marL="0">
+            <a:pPr marL="0" indent="0" algn="ctr">
               <a:buNone/>
             </a:pPr>
             <a:r>
@@ -2188,6 +1923,7 @@
         <a:solidFill>
           <a:srgbClr val="F5F5F5"/>
         </a:solidFill>
+        <a:effectLst/>
       </p:bgPr>
     </p:bg>
     <p:spTree>
@@ -2225,7 +1961,7 @@
           <a:bodyPr wrap="square" rtlCol="0" anchor="ctr"/>
           <a:lstStyle/>
           <a:p>
-            <a:pPr indent="0" marL="0">
+            <a:pPr marL="0" indent="0">
               <a:buNone/>
             </a:pPr>
             <a:r>
@@ -2245,14 +1981,14 @@
       </p:sp>
       <p:pic>
         <p:nvPicPr>
-          <p:cNvPr id="3" name="Image 0" descr="preencoded.png">    </p:cNvPr>
+          <p:cNvPr id="3" name="Image 0" descr="preencoded.png"/>
           <p:cNvPicPr>
             <a:picLocks noChangeAspect="1"/>
           </p:cNvPicPr>
           <p:nvPr/>
         </p:nvPicPr>
         <p:blipFill>
-          <a:blip r:embed="rId1"/>
+          <a:blip r:embed="rId3"/>
           <a:stretch>
             <a:fillRect/>
           </a:stretch>
@@ -2286,7 +2022,7 @@
           </a:solidFill>
           <a:ln/>
           <a:effectLst>
-            <a:outerShdw sx="100000" sy="100000" kx="0" ky="0" algn="bl" rotWithShape="0" blurRad="76200" dist="25400" dir="8100000">
+            <a:outerShdw blurRad="76200" dist="25400" dir="8100000" algn="bl" rotWithShape="0">
               <a:srgbClr val="000000">
                 <a:alpha val="10000"/>
               </a:srgbClr>
@@ -2315,7 +2051,7 @@
           <a:bodyPr wrap="square" rtlCol="0" anchor="ctr"/>
           <a:lstStyle/>
           <a:p>
-            <a:pPr indent="0" marL="0">
+            <a:pPr marL="0" indent="0">
               <a:buNone/>
             </a:pPr>
             <a:r>
@@ -2326,9 +2062,6 @@
               </a:rPr>
               <a:t>Algorithm: </a:t>
             </a:r>
-            <a:pPr indent="0" marL="0">
-              <a:buNone/>
-            </a:pPr>
             <a:r>
               <a:rPr lang="en-US" sz="1800" dirty="0">
                 <a:solidFill>
@@ -2362,7 +2095,7 @@
           <a:bodyPr wrap="square" rtlCol="0" anchor="ctr"/>
           <a:lstStyle/>
           <a:p>
-            <a:pPr indent="0" marL="0">
+            <a:pPr marL="0" indent="0">
               <a:buNone/>
             </a:pPr>
             <a:r>
@@ -2398,7 +2131,7 @@
           <a:bodyPr wrap="square" rtlCol="0" anchor="ctr"/>
           <a:lstStyle/>
           <a:p>
-            <a:pPr indent="0" marL="0">
+            <a:pPr marL="0" indent="0">
               <a:buNone/>
             </a:pPr>
             <a:r>
@@ -2421,7 +2154,7 @@
         </p:nvSpPr>
         <p:spPr>
           <a:xfrm>
-            <a:off x="457200" y="2926080"/>
+            <a:off x="457201" y="3017520"/>
             <a:ext cx="3931920" cy="1371600"/>
           </a:xfrm>
           <a:prstGeom prst="rect">
@@ -2432,7 +2165,7 @@
           </a:solidFill>
           <a:ln/>
           <a:effectLst>
-            <a:outerShdw sx="100000" sy="100000" kx="0" ky="0" algn="bl" rotWithShape="0" blurRad="76200" dist="25400" dir="8100000">
+            <a:outerShdw blurRad="76200" dist="25400" dir="8100000" algn="bl" rotWithShape="0">
               <a:srgbClr val="000000">
                 <a:alpha val="10000"/>
               </a:srgbClr>
@@ -2461,7 +2194,7 @@
           <a:bodyPr wrap="square" rtlCol="0" anchor="ctr"/>
           <a:lstStyle/>
           <a:p>
-            <a:pPr indent="0" marL="0">
+            <a:pPr marL="0" indent="0">
               <a:buNone/>
             </a:pPr>
             <a:r>
@@ -2497,7 +2230,7 @@
           <a:bodyPr wrap="square" rtlCol="0" anchor="ctr"/>
           <a:lstStyle/>
           <a:p>
-            <a:pPr indent="0" marL="0">
+            <a:pPr marL="0" indent="0">
               <a:buNone/>
             </a:pPr>
             <a:r>
@@ -2511,7 +2244,7 @@
             <a:endParaRPr lang="en-US" sz="1400" dirty="0"/>
           </a:p>
           <a:p>
-            <a:pPr indent="0" marL="0">
+            <a:pPr marL="0" indent="0">
               <a:buNone/>
             </a:pPr>
             <a:r>
@@ -2525,7 +2258,7 @@
             <a:endParaRPr lang="en-US" sz="1400" dirty="0"/>
           </a:p>
           <a:p>
-            <a:pPr indent="0" marL="0">
+            <a:pPr marL="0" indent="0">
               <a:buNone/>
             </a:pPr>
             <a:r>
@@ -2539,7 +2272,7 @@
             <a:endParaRPr lang="en-US" sz="1400" dirty="0"/>
           </a:p>
           <a:p>
-            <a:pPr indent="0" marL="0">
+            <a:pPr marL="0" indent="0">
               <a:buNone/>
             </a:pPr>
             <a:r>
@@ -2562,7 +2295,7 @@
         </p:nvSpPr>
         <p:spPr>
           <a:xfrm>
-            <a:off x="4754880" y="2926080"/>
+            <a:off x="4754880" y="3017520"/>
             <a:ext cx="3931920" cy="1371600"/>
           </a:xfrm>
           <a:prstGeom prst="rect">
@@ -2573,7 +2306,7 @@
           </a:solidFill>
           <a:ln/>
           <a:effectLst>
-            <a:outerShdw sx="100000" sy="100000" kx="0" ky="0" algn="bl" rotWithShape="0" blurRad="76200" dist="25400" dir="8100000">
+            <a:outerShdw blurRad="76200" dist="25400" dir="8100000" algn="bl" rotWithShape="0">
               <a:srgbClr val="000000">
                 <a:alpha val="10000"/>
               </a:srgbClr>
@@ -2602,7 +2335,7 @@
           <a:bodyPr wrap="square" rtlCol="0" anchor="ctr"/>
           <a:lstStyle/>
           <a:p>
-            <a:pPr indent="0" marL="0">
+            <a:pPr marL="0" indent="0">
               <a:buNone/>
             </a:pPr>
             <a:r>
@@ -2638,7 +2371,7 @@
           <a:bodyPr wrap="square" rtlCol="0" anchor="ctr"/>
           <a:lstStyle/>
           <a:p>
-            <a:pPr indent="0" marL="0">
+            <a:pPr marL="0" indent="0">
               <a:buNone/>
             </a:pPr>
             <a:r>
@@ -2652,7 +2385,7 @@
             <a:endParaRPr lang="en-US" sz="1300" dirty="0"/>
           </a:p>
           <a:p>
-            <a:pPr indent="0" marL="0">
+            <a:pPr marL="0" indent="0">
               <a:buNone/>
             </a:pPr>
             <a:r>
@@ -2666,7 +2399,7 @@
             <a:endParaRPr lang="en-US" sz="1300" dirty="0"/>
           </a:p>
           <a:p>
-            <a:pPr indent="0" marL="0">
+            <a:pPr marL="0" indent="0">
               <a:buNone/>
             </a:pPr>
             <a:r>
@@ -2680,7 +2413,7 @@
             <a:endParaRPr lang="en-US" sz="1300" dirty="0"/>
           </a:p>
           <a:p>
-            <a:pPr indent="0" marL="0">
+            <a:pPr marL="0" indent="0">
               <a:buNone/>
             </a:pPr>
             <a:r>
@@ -2694,7 +2427,7 @@
             <a:endParaRPr lang="en-US" sz="1300" dirty="0"/>
           </a:p>
           <a:p>
-            <a:pPr indent="0" marL="0">
+            <a:pPr marL="0" indent="0">
               <a:buNone/>
             </a:pPr>
             <a:r>
@@ -2725,6 +2458,7 @@
         <a:solidFill>
           <a:srgbClr val="F5F5F5"/>
         </a:solidFill>
+        <a:effectLst/>
       </p:bgPr>
     </p:bg>
     <p:spTree>
@@ -2762,7 +2496,7 @@
           <a:bodyPr wrap="square" rtlCol="0" anchor="ctr"/>
           <a:lstStyle/>
           <a:p>
-            <a:pPr indent="0" marL="0">
+            <a:pPr marL="0" indent="0">
               <a:buNone/>
             </a:pPr>
             <a:r>
@@ -2801,7 +2535,7 @@
           <a:bodyPr wrap="square" rtlCol="0" anchor="ctr"/>
           <a:lstStyle/>
           <a:p>
-            <a:pPr indent="0" marL="0">
+            <a:pPr marL="0" indent="0">
               <a:buNone/>
             </a:pPr>
             <a:r>
@@ -2835,7 +2569,7 @@
           </a:solidFill>
           <a:ln/>
           <a:effectLst>
-            <a:outerShdw sx="100000" sy="100000" kx="0" ky="0" algn="bl" rotWithShape="0" blurRad="76200" dist="25400" dir="8100000">
+            <a:outerShdw blurRad="76200" dist="25400" dir="8100000" algn="bl" rotWithShape="0">
               <a:srgbClr val="000000">
                 <a:alpha val="10000"/>
               </a:srgbClr>
@@ -2864,7 +2598,7 @@
           <a:bodyPr wrap="square" rtlCol="0" anchor="ctr"/>
           <a:lstStyle/>
           <a:p>
-            <a:pPr indent="0" marL="0">
+            <a:pPr marL="0" indent="0">
               <a:buNone/>
             </a:pPr>
             <a:r>
@@ -2875,9 +2609,6 @@
               </a:rPr>
               <a:t>Baseline</a:t>
             </a:r>
-            <a:pPr indent="0" marL="0">
-              <a:buNone/>
-            </a:pPr>
             <a:r>
               <a:rPr lang="en-US" sz="1300" dirty="0">
                 <a:solidFill>
@@ -2909,7 +2640,7 @@
           </a:solidFill>
           <a:ln/>
           <a:effectLst>
-            <a:outerShdw sx="100000" sy="100000" kx="0" ky="0" algn="bl" rotWithShape="0" blurRad="76200" dist="25400" dir="8100000">
+            <a:outerShdw blurRad="76200" dist="25400" dir="8100000" algn="bl" rotWithShape="0">
               <a:srgbClr val="000000">
                 <a:alpha val="10000"/>
               </a:srgbClr>
@@ -2938,7 +2669,7 @@
           <a:bodyPr wrap="square" rtlCol="0" anchor="ctr"/>
           <a:lstStyle/>
           <a:p>
-            <a:pPr indent="0" marL="0">
+            <a:pPr marL="0" indent="0">
               <a:buNone/>
             </a:pPr>
             <a:r>
@@ -2949,9 +2680,6 @@
               </a:rPr>
               <a:t>Optimized</a:t>
             </a:r>
-            <a:pPr indent="0" marL="0">
-              <a:buNone/>
-            </a:pPr>
             <a:r>
               <a:rPr lang="en-US" sz="1300" dirty="0">
                 <a:solidFill>
@@ -2983,7 +2711,7 @@
           </a:solidFill>
           <a:ln/>
           <a:effectLst>
-            <a:outerShdw sx="100000" sy="100000" kx="0" ky="0" algn="bl" rotWithShape="0" blurRad="76200" dist="25400" dir="8100000">
+            <a:outerShdw blurRad="76200" dist="25400" dir="8100000" algn="bl" rotWithShape="0">
               <a:srgbClr val="000000">
                 <a:alpha val="10000"/>
               </a:srgbClr>
@@ -3012,7 +2740,7 @@
           <a:bodyPr wrap="square" rtlCol="0" anchor="ctr"/>
           <a:lstStyle/>
           <a:p>
-            <a:pPr indent="0" marL="0">
+            <a:pPr marL="0" indent="0">
               <a:buNone/>
             </a:pPr>
             <a:r>
@@ -3023,9 +2751,6 @@
               </a:rPr>
               <a:t>Inefficient</a:t>
             </a:r>
-            <a:pPr indent="0" marL="0">
-              <a:buNone/>
-            </a:pPr>
             <a:r>
               <a:rPr lang="en-US" sz="1300" dirty="0">
                 <a:solidFill>
@@ -3057,7 +2782,7 @@
           </a:solidFill>
           <a:ln/>
           <a:effectLst>
-            <a:outerShdw sx="100000" sy="100000" kx="0" ky="0" algn="bl" rotWithShape="0" blurRad="76200" dist="25400" dir="8100000">
+            <a:outerShdw blurRad="76200" dist="25400" dir="8100000" algn="bl" rotWithShape="0">
               <a:srgbClr val="000000">
                 <a:alpha val="10000"/>
               </a:srgbClr>
@@ -3086,7 +2811,7 @@
           <a:bodyPr wrap="square" rtlCol="0" anchor="ctr"/>
           <a:lstStyle/>
           <a:p>
-            <a:pPr indent="0" marL="0">
+            <a:pPr marL="0" indent="0">
               <a:buNone/>
             </a:pPr>
             <a:r>
@@ -3122,7 +2847,7 @@
           <a:bodyPr wrap="square" rtlCol="0" anchor="ctr"/>
           <a:lstStyle/>
           <a:p>
-            <a:pPr indent="0" marL="0">
+            <a:pPr marL="0" indent="0">
               <a:buNone/>
             </a:pPr>
             <a:r>
@@ -3136,7 +2861,7 @@
             <a:endParaRPr lang="en-US" sz="1300" dirty="0"/>
           </a:p>
           <a:p>
-            <a:pPr indent="0" marL="0">
+            <a:pPr marL="0" indent="0">
               <a:buNone/>
             </a:pPr>
             <a:r>
@@ -3150,7 +2875,7 @@
             <a:endParaRPr lang="en-US" sz="1300" dirty="0"/>
           </a:p>
           <a:p>
-            <a:pPr indent="0" marL="0">
+            <a:pPr marL="0" indent="0">
               <a:buNone/>
             </a:pPr>
             <a:r>
@@ -3164,7 +2889,7 @@
             <a:endParaRPr lang="en-US" sz="1300" dirty="0"/>
           </a:p>
           <a:p>
-            <a:pPr indent="0" marL="0">
+            <a:pPr marL="0" indent="0">
               <a:buNone/>
             </a:pPr>
             <a:r>
@@ -3178,7 +2903,7 @@
             <a:endParaRPr lang="en-US" sz="1300" dirty="0"/>
           </a:p>
           <a:p>
-            <a:pPr indent="0" marL="0">
+            <a:pPr marL="0" indent="0">
               <a:buNone/>
             </a:pPr>
             <a:r>
@@ -3192,7 +2917,7 @@
             <a:endParaRPr lang="en-US" sz="1300" dirty="0"/>
           </a:p>
           <a:p>
-            <a:pPr indent="0" marL="0">
+            <a:pPr marL="0" indent="0">
               <a:buNone/>
             </a:pPr>
             <a:r>
@@ -3206,7 +2931,7 @@
             <a:endParaRPr lang="en-US" sz="1300" dirty="0"/>
           </a:p>
           <a:p>
-            <a:pPr indent="0" marL="0">
+            <a:pPr marL="0" indent="0">
               <a:buNone/>
             </a:pPr>
             <a:r>
@@ -3220,7 +2945,7 @@
             <a:endParaRPr lang="en-US" sz="1300" dirty="0"/>
           </a:p>
           <a:p>
-            <a:pPr indent="0" marL="0">
+            <a:pPr marL="0" indent="0">
               <a:buNone/>
             </a:pPr>
             <a:r>
@@ -3234,7 +2959,7 @@
             <a:endParaRPr lang="en-US" sz="1300" dirty="0"/>
           </a:p>
           <a:p>
-            <a:pPr indent="0" marL="0">
+            <a:pPr marL="0" indent="0">
               <a:buNone/>
             </a:pPr>
             <a:r>
@@ -3270,7 +2995,7 @@
           <a:bodyPr wrap="square" rtlCol="0" anchor="ctr"/>
           <a:lstStyle/>
           <a:p>
-            <a:pPr algn="ctr" indent="0" marL="0">
+            <a:pPr marL="0" indent="0" algn="ctr">
               <a:buNone/>
             </a:pPr>
             <a:r>
@@ -3301,6 +3026,7 @@
         <a:solidFill>
           <a:srgbClr val="2C5F2D"/>
         </a:solidFill>
+        <a:effectLst/>
       </p:bgPr>
     </p:bg>
     <p:spTree>
@@ -3319,14 +3045,14 @@
       </p:grpSpPr>
       <p:pic>
         <p:nvPicPr>
-          <p:cNvPr id="2" name="Image 0" descr="preencoded.png">    </p:cNvPr>
+          <p:cNvPr id="2" name="Image 0" descr="preencoded.png"/>
           <p:cNvPicPr>
             <a:picLocks noChangeAspect="1"/>
           </p:cNvPicPr>
           <p:nvPr/>
         </p:nvPicPr>
         <p:blipFill>
-          <a:blip r:embed="rId1"/>
+          <a:blip r:embed="rId3"/>
           <a:stretch>
             <a:fillRect/>
           </a:stretch>
@@ -3362,7 +3088,7 @@
           <a:bodyPr wrap="square" rtlCol="0" anchor="ctr"/>
           <a:lstStyle/>
           <a:p>
-            <a:pPr indent="0" marL="0">
+            <a:pPr marL="0" indent="0">
               <a:buNone/>
             </a:pPr>
             <a:r>
@@ -3399,7 +3125,7 @@
           </a:solidFill>
           <a:ln/>
           <a:effectLst>
-            <a:outerShdw sx="100000" sy="100000" kx="0" ky="0" algn="bl" rotWithShape="0" blurRad="76200" dist="25400" dir="8100000">
+            <a:outerShdw blurRad="76200" dist="25400" dir="8100000" algn="bl" rotWithShape="0">
               <a:srgbClr val="000000">
                 <a:alpha val="10000"/>
               </a:srgbClr>
@@ -3428,7 +3154,7 @@
           <a:bodyPr wrap="square" rtlCol="0" anchor="ctr"/>
           <a:lstStyle/>
           <a:p>
-            <a:pPr indent="0" marL="0">
+            <a:pPr marL="0" indent="0">
               <a:buNone/>
             </a:pPr>
             <a:r>
@@ -3464,7 +3190,7 @@
           <a:bodyPr wrap="square" rtlCol="0" anchor="ctr"/>
           <a:lstStyle/>
           <a:p>
-            <a:pPr indent="0" marL="0">
+            <a:pPr marL="0" indent="0">
               <a:buNone/>
             </a:pPr>
             <a:r>
@@ -3500,7 +3226,7 @@
           </a:solidFill>
           <a:ln/>
           <a:effectLst>
-            <a:outerShdw sx="100000" sy="100000" kx="0" ky="0" algn="bl" rotWithShape="0" blurRad="76200" dist="25400" dir="8100000">
+            <a:outerShdw blurRad="76200" dist="25400" dir="8100000" algn="bl" rotWithShape="0">
               <a:srgbClr val="000000">
                 <a:alpha val="10000"/>
               </a:srgbClr>
@@ -3529,7 +3255,7 @@
           <a:bodyPr wrap="square" rtlCol="0" anchor="ctr"/>
           <a:lstStyle/>
           <a:p>
-            <a:pPr indent="0" marL="0">
+            <a:pPr marL="0" indent="0">
               <a:buNone/>
             </a:pPr>
             <a:r>
@@ -3565,7 +3291,7 @@
           <a:bodyPr wrap="square" rtlCol="0" anchor="ctr"/>
           <a:lstStyle/>
           <a:p>
-            <a:pPr indent="0" marL="0">
+            <a:pPr marL="0" indent="0">
               <a:buNone/>
             </a:pPr>
             <a:r>
@@ -3599,7 +3325,7 @@
           </a:solidFill>
           <a:ln/>
           <a:effectLst>
-            <a:outerShdw sx="100000" sy="100000" kx="0" ky="0" algn="bl" rotWithShape="0" blurRad="76200" dist="25400" dir="8100000">
+            <a:outerShdw blurRad="76200" dist="25400" dir="8100000" algn="bl" rotWithShape="0">
               <a:srgbClr val="000000">
                 <a:alpha val="10000"/>
               </a:srgbClr>
@@ -3628,7 +3354,7 @@
           <a:bodyPr wrap="square" rtlCol="0" anchor="ctr"/>
           <a:lstStyle/>
           <a:p>
-            <a:pPr indent="0" marL="0">
+            <a:pPr marL="0" indent="0">
               <a:buNone/>
             </a:pPr>
             <a:r>
@@ -3664,7 +3390,7 @@
           <a:bodyPr wrap="square" rtlCol="0" anchor="ctr"/>
           <a:lstStyle/>
           <a:p>
-            <a:pPr indent="0" marL="0">
+            <a:pPr marL="0" indent="0">
               <a:buNone/>
             </a:pPr>
             <a:r>
@@ -3700,7 +3426,7 @@
           </a:solidFill>
           <a:ln/>
           <a:effectLst>
-            <a:outerShdw sx="100000" sy="100000" kx="0" ky="0" algn="bl" rotWithShape="0" blurRad="76200" dist="25400" dir="8100000">
+            <a:outerShdw blurRad="76200" dist="25400" dir="8100000" algn="bl" rotWithShape="0">
               <a:srgbClr val="000000">
                 <a:alpha val="10000"/>
               </a:srgbClr>
@@ -3729,7 +3455,7 @@
           <a:bodyPr wrap="square" rtlCol="0" anchor="ctr"/>
           <a:lstStyle/>
           <a:p>
-            <a:pPr indent="0" marL="0">
+            <a:pPr marL="0" indent="0">
               <a:buNone/>
             </a:pPr>
             <a:r>
@@ -3765,7 +3491,7 @@
           <a:bodyPr wrap="square" rtlCol="0" anchor="ctr"/>
           <a:lstStyle/>
           <a:p>
-            <a:pPr indent="0" marL="0">
+            <a:pPr marL="0" indent="0">
               <a:buNone/>
             </a:pPr>
             <a:r>
@@ -3777,42 +3503,6 @@
               <a:t>Demonstrates how organizations can adopt environmentally responsible digital behaviors supported by intelligent computing</a:t>
             </a:r>
             <a:endParaRPr lang="en-US" sz="1300" dirty="0"/>
-          </a:p>
-        </p:txBody>
-      </p:sp>
-      <p:sp>
-        <p:nvSpPr>
-          <p:cNvPr id="16" name="Text 13"/>
-          <p:cNvSpPr/>
-          <p:nvPr/>
-        </p:nvSpPr>
-        <p:spPr>
-          <a:xfrm>
-            <a:off x="457200" y="4572000"/>
-            <a:ext cx="8229600" cy="365760"/>
-          </a:xfrm>
-          <a:prstGeom prst="rect">
-            <a:avLst/>
-          </a:prstGeom>
-          <a:noFill/>
-          <a:ln/>
-        </p:spPr>
-        <p:txBody>
-          <a:bodyPr wrap="square" rtlCol="0" anchor="ctr"/>
-          <a:lstStyle/>
-          <a:p>
-            <a:pPr algn="ctr" indent="0" marL="0">
-              <a:buNone/>
-            </a:pPr>
-            <a:r>
-              <a:rPr lang="en-US" sz="1800" b="1" i="1" dirty="0">
-                <a:solidFill>
-                  <a:srgbClr val="97BC62"/>
-                </a:solidFill>
-              </a:rPr>
-              <a:t>Green computing is not just a concept—it's an actionable, deployable reality</a:t>
-            </a:r>
-            <a:endParaRPr lang="en-US" sz="1800" dirty="0"/>
           </a:p>
         </p:txBody>
       </p:sp>
@@ -3832,6 +3522,7 @@
         <a:solidFill>
           <a:srgbClr val="1E2761"/>
         </a:solidFill>
+        <a:effectLst/>
       </p:bgPr>
     </p:bg>
     <p:spTree>
@@ -3856,7 +3547,7 @@
         </p:nvSpPr>
         <p:spPr>
           <a:xfrm>
-            <a:off x="457200" y="1371600"/>
+            <a:off x="457200" y="1840230"/>
             <a:ext cx="8229600" cy="731520"/>
           </a:xfrm>
           <a:prstGeom prst="rect">
@@ -3869,7 +3560,7 @@
           <a:bodyPr wrap="square" rtlCol="0" anchor="ctr"/>
           <a:lstStyle/>
           <a:p>
-            <a:pPr algn="ctr" indent="0" marL="0">
+            <a:pPr marL="0" indent="0" algn="ctr">
               <a:buNone/>
             </a:pPr>
             <a:r>
@@ -3887,142 +3578,23 @@
           </a:p>
         </p:txBody>
       </p:sp>
-      <p:sp>
-        <p:nvSpPr>
-          <p:cNvPr id="3" name="Shape 1"/>
-          <p:cNvSpPr/>
-          <p:nvPr/>
-        </p:nvSpPr>
-        <p:spPr>
-          <a:xfrm>
-            <a:off x="1828800" y="2468880"/>
-            <a:ext cx="5486400" cy="1371600"/>
-          </a:xfrm>
-          <a:prstGeom prst="rect">
-            <a:avLst/>
-          </a:prstGeom>
-          <a:solidFill>
-            <a:srgbClr val="2C5F2D"/>
-          </a:solidFill>
-          <a:ln/>
-          <a:effectLst>
-            <a:outerShdw sx="100000" sy="100000" kx="0" ky="0" algn="bl" rotWithShape="0" blurRad="76200" dist="25400" dir="8100000">
-              <a:srgbClr val="000000">
-                <a:alpha val="10000"/>
-              </a:srgbClr>
-            </a:outerShdw>
-          </a:effectLst>
-        </p:spPr>
-      </p:sp>
-      <p:sp>
-        <p:nvSpPr>
-          <p:cNvPr id="4" name="Text 2"/>
-          <p:cNvSpPr/>
-          <p:nvPr/>
-        </p:nvSpPr>
-        <p:spPr>
-          <a:xfrm>
-            <a:off x="2011680" y="2560320"/>
-            <a:ext cx="5120640" cy="1188720"/>
-          </a:xfrm>
-          <a:prstGeom prst="rect">
-            <a:avLst/>
-          </a:prstGeom>
-          <a:noFill/>
-          <a:ln/>
-        </p:spPr>
-        <p:txBody>
-          <a:bodyPr wrap="square" rtlCol="0" anchor="ctr"/>
-          <a:lstStyle/>
-          <a:p>
-            <a:pPr algn="ctr" indent="0" marL="0">
-              <a:buNone/>
-            </a:pPr>
-            <a:r>
-              <a:rPr lang="en-US" sz="1500" dirty="0">
-                <a:solidFill>
-                  <a:srgbClr val="FFFFFF"/>
-                </a:solidFill>
-              </a:rPr>
-              <a:t>Department of Computer Science and Engineering</a:t>
-            </a:r>
-            <a:endParaRPr lang="en-US" sz="1500" dirty="0"/>
-          </a:p>
-          <a:p>
-            <a:pPr algn="ctr" indent="0" marL="0">
-              <a:buNone/>
-            </a:pPr>
-            <a:r>
-              <a:rPr lang="en-US" sz="1500" dirty="0">
-                <a:solidFill>
-                  <a:srgbClr val="FFFFFF"/>
-                </a:solidFill>
-              </a:rPr>
-              <a:t>United International University</a:t>
-            </a:r>
-            <a:endParaRPr lang="en-US" sz="1500" dirty="0"/>
-          </a:p>
-          <a:p>
-            <a:pPr algn="ctr" indent="0" marL="0">
-              <a:buNone/>
-            </a:pPr>
-            <a:r>
-              <a:rPr lang="en-US" sz="1500" dirty="0">
-                <a:solidFill>
-                  <a:srgbClr val="FFFFFF"/>
-                </a:solidFill>
-              </a:rPr>
-              <a:t>Dhaka, Bangladesh</a:t>
-            </a:r>
-            <a:endParaRPr lang="en-US" sz="1500" dirty="0"/>
-          </a:p>
-          <a:p>
-            <a:pPr algn="ctr" indent="0" marL="0">
-              <a:buNone/>
-            </a:pPr>
-            <a:r>
-              <a:rPr lang="en-US" sz="1500" dirty="0">
-                <a:solidFill>
-                  <a:srgbClr val="FFFFFF"/>
-                </a:solidFill>
-              </a:rPr>
-              <a:t> </a:t>
-            </a:r>
-            <a:endParaRPr lang="en-US" sz="1500" dirty="0"/>
-          </a:p>
-          <a:p>
-            <a:pPr algn="ctr" indent="0" marL="0">
-              <a:buNone/>
-            </a:pPr>
-            <a:r>
-              <a:rPr lang="en-US" sz="1500" dirty="0">
-                <a:solidFill>
-                  <a:srgbClr val="FFFFFF"/>
-                </a:solidFill>
-              </a:rPr>
-              <a:t>Disclosure: The authors have no competing interests to declare</a:t>
-            </a:r>
-            <a:endParaRPr lang="en-US" sz="1500" dirty="0"/>
-          </a:p>
-        </p:txBody>
-      </p:sp>
       <p:pic>
         <p:nvPicPr>
-          <p:cNvPr id="5" name="Image 0" descr="preencoded.png">    </p:cNvPr>
+          <p:cNvPr id="5" name="Image 0" descr="preencoded.png"/>
           <p:cNvPicPr>
             <a:picLocks noChangeAspect="1"/>
           </p:cNvPicPr>
           <p:nvPr/>
         </p:nvPicPr>
         <p:blipFill>
-          <a:blip r:embed="rId1"/>
+          <a:blip r:embed="rId3"/>
           <a:stretch>
             <a:fillRect/>
           </a:stretch>
         </p:blipFill>
         <p:spPr>
           <a:xfrm>
-            <a:off x="4343400" y="4206240"/>
+            <a:off x="4343400" y="2988595"/>
             <a:ext cx="457200" cy="457200"/>
           </a:xfrm>
           <a:prstGeom prst="rect">
@@ -4046,6 +3618,7 @@
         <a:solidFill>
           <a:srgbClr val="F5F5F5"/>
         </a:solidFill>
+        <a:effectLst/>
       </p:bgPr>
     </p:bg>
     <p:spTree>
@@ -4083,7 +3656,7 @@
           <a:bodyPr wrap="square" rtlCol="0" anchor="ctr"/>
           <a:lstStyle/>
           <a:p>
-            <a:pPr indent="0" marL="0">
+            <a:pPr marL="0" indent="0">
               <a:buNone/>
             </a:pPr>
             <a:r>
@@ -4103,14 +3676,14 @@
       </p:sp>
       <p:pic>
         <p:nvPicPr>
-          <p:cNvPr id="3" name="Image 0" descr="preencoded.png">    </p:cNvPr>
+          <p:cNvPr id="3" name="Image 0" descr="preencoded.png"/>
           <p:cNvPicPr>
             <a:picLocks noChangeAspect="1"/>
           </p:cNvPicPr>
           <p:nvPr/>
         </p:nvPicPr>
         <p:blipFill>
-          <a:blip r:embed="rId1"/>
+          <a:blip r:embed="rId3"/>
           <a:stretch>
             <a:fillRect/>
           </a:stretch>
@@ -4146,7 +3719,7 @@
           <a:bodyPr wrap="square" rtlCol="0" anchor="ctr"/>
           <a:lstStyle/>
           <a:p>
-            <a:pPr indent="0" marL="0">
+            <a:pPr marL="0" indent="0">
               <a:buNone/>
             </a:pPr>
             <a:r>
@@ -4160,7 +3733,7 @@
             <a:endParaRPr lang="en-US" sz="1500" dirty="0"/>
           </a:p>
           <a:p>
-            <a:pPr indent="0" marL="0">
+            <a:pPr marL="0" indent="0">
               <a:buNone/>
             </a:pPr>
             <a:r>
@@ -4194,7 +3767,7 @@
           </a:solidFill>
           <a:ln/>
           <a:effectLst>
-            <a:outerShdw sx="100000" sy="100000" kx="0" ky="0" algn="bl" rotWithShape="0" blurRad="76200" dist="25400" dir="8100000">
+            <a:outerShdw blurRad="76200" dist="25400" dir="8100000" algn="bl" rotWithShape="0">
               <a:srgbClr val="000000">
                 <a:alpha val="10000"/>
               </a:srgbClr>
@@ -4223,7 +3796,7 @@
           <a:bodyPr wrap="square" rtlCol="0" anchor="ctr"/>
           <a:lstStyle/>
           <a:p>
-            <a:pPr indent="0" marL="0">
+            <a:pPr marL="0" indent="0">
               <a:buNone/>
             </a:pPr>
             <a:r>
@@ -4237,7 +3810,7 @@
             <a:endParaRPr lang="en-US" sz="1400" dirty="0"/>
           </a:p>
           <a:p>
-            <a:pPr indent="0" marL="0">
+            <a:pPr marL="0" indent="0">
               <a:buNone/>
             </a:pPr>
             <a:r>
@@ -4271,7 +3844,7 @@
           </a:solidFill>
           <a:ln/>
           <a:effectLst>
-            <a:outerShdw sx="100000" sy="100000" kx="0" ky="0" algn="bl" rotWithShape="0" blurRad="76200" dist="25400" dir="8100000">
+            <a:outerShdw blurRad="76200" dist="25400" dir="8100000" algn="bl" rotWithShape="0">
               <a:srgbClr val="000000">
                 <a:alpha val="10000"/>
               </a:srgbClr>
@@ -4300,7 +3873,7 @@
           <a:bodyPr wrap="square" rtlCol="0" anchor="ctr"/>
           <a:lstStyle/>
           <a:p>
-            <a:pPr indent="0" marL="0">
+            <a:pPr marL="0" indent="0">
               <a:buNone/>
             </a:pPr>
             <a:r>
@@ -4314,7 +3887,7 @@
             <a:endParaRPr lang="en-US" sz="1400" dirty="0"/>
           </a:p>
           <a:p>
-            <a:pPr indent="0" marL="0">
+            <a:pPr marL="0" indent="0">
               <a:buNone/>
             </a:pPr>
             <a:r>
@@ -4331,14 +3904,14 @@
       </p:sp>
       <p:pic>
         <p:nvPicPr>
-          <p:cNvPr id="9" name="Image 1" descr="preencoded.png">    </p:cNvPr>
+          <p:cNvPr id="9" name="Image 1" descr="preencoded.png"/>
           <p:cNvPicPr>
             <a:picLocks noChangeAspect="1"/>
           </p:cNvPicPr>
           <p:nvPr/>
         </p:nvPicPr>
         <p:blipFill>
-          <a:blip r:embed="rId2"/>
+          <a:blip r:embed="rId4"/>
           <a:stretch>
             <a:fillRect/>
           </a:stretch>
@@ -4374,7 +3947,7 @@
           <a:bodyPr wrap="square" rtlCol="0" anchor="ctr"/>
           <a:lstStyle/>
           <a:p>
-            <a:pPr indent="0" marL="0">
+            <a:pPr marL="0" indent="0">
               <a:buNone/>
             </a:pPr>
             <a:r>
@@ -4388,7 +3961,7 @@
             <a:endParaRPr lang="en-US" sz="1500" dirty="0"/>
           </a:p>
           <a:p>
-            <a:pPr indent="0" marL="0">
+            <a:pPr marL="0" indent="0">
               <a:buNone/>
             </a:pPr>
             <a:r>
@@ -4419,6 +3992,7 @@
         <a:solidFill>
           <a:srgbClr val="F5F5F5"/>
         </a:solidFill>
+        <a:effectLst/>
       </p:bgPr>
     </p:bg>
     <p:spTree>
@@ -4456,7 +4030,7 @@
           <a:bodyPr wrap="square" rtlCol="0" anchor="ctr"/>
           <a:lstStyle/>
           <a:p>
-            <a:pPr indent="0" marL="0">
+            <a:pPr marL="0" indent="0">
               <a:buNone/>
             </a:pPr>
             <a:r>
@@ -4493,7 +4067,7 @@
           </a:solidFill>
           <a:ln/>
           <a:effectLst>
-            <a:outerShdw sx="100000" sy="100000" kx="0" ky="0" algn="bl" rotWithShape="0" blurRad="76200" dist="25400" dir="8100000">
+            <a:outerShdw blurRad="76200" dist="25400" dir="8100000" algn="bl" rotWithShape="0">
               <a:srgbClr val="000000">
                 <a:alpha val="10000"/>
               </a:srgbClr>
@@ -4522,7 +4096,7 @@
           <a:bodyPr wrap="square" rtlCol="0" anchor="ctr"/>
           <a:lstStyle/>
           <a:p>
-            <a:pPr algn="ctr" indent="0" marL="0">
+            <a:pPr marL="0" indent="0" algn="ctr">
               <a:buNone/>
             </a:pPr>
             <a:r>
@@ -4536,7 +4110,7 @@
             <a:endParaRPr lang="en-US" sz="1400" dirty="0"/>
           </a:p>
           <a:p>
-            <a:pPr algn="ctr" indent="0" marL="0">
+            <a:pPr marL="0" indent="0" algn="ctr">
               <a:buNone/>
             </a:pPr>
             <a:r>
@@ -4550,7 +4124,7 @@
             <a:endParaRPr lang="en-US" sz="1400" dirty="0"/>
           </a:p>
           <a:p>
-            <a:pPr algn="ctr" indent="0" marL="0">
+            <a:pPr marL="0" indent="0" algn="ctr">
               <a:buNone/>
             </a:pPr>
             <a:r>
@@ -4564,7 +4138,7 @@
             <a:endParaRPr lang="en-US" sz="1400" dirty="0"/>
           </a:p>
           <a:p>
-            <a:pPr algn="ctr" indent="0" marL="0">
+            <a:pPr marL="0" indent="0" algn="ctr">
               <a:buNone/>
             </a:pPr>
             <a:r>
@@ -4598,7 +4172,7 @@
           </a:solidFill>
           <a:ln/>
           <a:effectLst>
-            <a:outerShdw sx="100000" sy="100000" kx="0" ky="0" algn="bl" rotWithShape="0" blurRad="76200" dist="25400" dir="8100000">
+            <a:outerShdw blurRad="76200" dist="25400" dir="8100000" algn="bl" rotWithShape="0">
               <a:srgbClr val="000000">
                 <a:alpha val="10000"/>
               </a:srgbClr>
@@ -4627,7 +4201,7 @@
           <a:bodyPr wrap="square" rtlCol="0" anchor="ctr"/>
           <a:lstStyle/>
           <a:p>
-            <a:pPr algn="ctr" indent="0" marL="0">
+            <a:pPr marL="0" indent="0" algn="ctr">
               <a:buNone/>
             </a:pPr>
             <a:r>
@@ -4641,7 +4215,7 @@
             <a:endParaRPr lang="en-US" sz="1400" dirty="0"/>
           </a:p>
           <a:p>
-            <a:pPr algn="ctr" indent="0" marL="0">
+            <a:pPr marL="0" indent="0" algn="ctr">
               <a:buNone/>
             </a:pPr>
             <a:r>
@@ -4655,7 +4229,7 @@
             <a:endParaRPr lang="en-US" sz="1400" dirty="0"/>
           </a:p>
           <a:p>
-            <a:pPr algn="ctr" indent="0" marL="0">
+            <a:pPr marL="0" indent="0" algn="ctr">
               <a:buNone/>
             </a:pPr>
             <a:r>
@@ -4669,7 +4243,7 @@
             <a:endParaRPr lang="en-US" sz="1400" dirty="0"/>
           </a:p>
           <a:p>
-            <a:pPr algn="ctr" indent="0" marL="0">
+            <a:pPr marL="0" indent="0" algn="ctr">
               <a:buNone/>
             </a:pPr>
             <a:r>
@@ -4703,7 +4277,7 @@
           </a:solidFill>
           <a:ln/>
           <a:effectLst>
-            <a:outerShdw sx="100000" sy="100000" kx="0" ky="0" algn="bl" rotWithShape="0" blurRad="76200" dist="25400" dir="8100000">
+            <a:outerShdw blurRad="76200" dist="25400" dir="8100000" algn="bl" rotWithShape="0">
               <a:srgbClr val="000000">
                 <a:alpha val="10000"/>
               </a:srgbClr>
@@ -4732,7 +4306,7 @@
           <a:bodyPr wrap="square" rtlCol="0" anchor="ctr"/>
           <a:lstStyle/>
           <a:p>
-            <a:pPr algn="ctr" indent="0" marL="0">
+            <a:pPr marL="0" indent="0" algn="ctr">
               <a:buNone/>
             </a:pPr>
             <a:r>
@@ -4746,7 +4320,7 @@
             <a:endParaRPr lang="en-US" sz="1400" dirty="0"/>
           </a:p>
           <a:p>
-            <a:pPr algn="ctr" indent="0" marL="0">
+            <a:pPr marL="0" indent="0" algn="ctr">
               <a:buNone/>
             </a:pPr>
             <a:r>
@@ -4760,7 +4334,7 @@
             <a:endParaRPr lang="en-US" sz="1400" dirty="0"/>
           </a:p>
           <a:p>
-            <a:pPr algn="ctr" indent="0" marL="0">
+            <a:pPr marL="0" indent="0" algn="ctr">
               <a:buNone/>
             </a:pPr>
             <a:r>
@@ -4774,7 +4348,7 @@
             <a:endParaRPr lang="en-US" sz="1400" dirty="0"/>
           </a:p>
           <a:p>
-            <a:pPr algn="ctr" indent="0" marL="0">
+            <a:pPr marL="0" indent="0" algn="ctr">
               <a:buNone/>
             </a:pPr>
             <a:r>
@@ -4808,7 +4382,7 @@
           </a:solidFill>
           <a:ln/>
           <a:effectLst>
-            <a:outerShdw sx="100000" sy="100000" kx="0" ky="0" algn="bl" rotWithShape="0" blurRad="76200" dist="25400" dir="8100000">
+            <a:outerShdw blurRad="76200" dist="25400" dir="8100000" algn="bl" rotWithShape="0">
               <a:srgbClr val="000000">
                 <a:alpha val="10000"/>
               </a:srgbClr>
@@ -4837,7 +4411,7 @@
           <a:bodyPr wrap="square" rtlCol="0" anchor="ctr"/>
           <a:lstStyle/>
           <a:p>
-            <a:pPr algn="ctr" indent="0" marL="0">
+            <a:pPr marL="0" indent="0" algn="ctr">
               <a:buNone/>
             </a:pPr>
             <a:r>
@@ -4851,7 +4425,7 @@
             <a:endParaRPr lang="en-US" sz="1600" dirty="0"/>
           </a:p>
           <a:p>
-            <a:pPr algn="ctr" indent="0" marL="0">
+            <a:pPr marL="0" indent="0" algn="ctr">
               <a:buNone/>
             </a:pPr>
             <a:r>
@@ -4865,7 +4439,7 @@
             <a:endParaRPr lang="en-US" sz="1600" dirty="0"/>
           </a:p>
           <a:p>
-            <a:pPr algn="ctr" indent="0" marL="0">
+            <a:pPr marL="0" indent="0" algn="ctr">
               <a:buNone/>
             </a:pPr>
             <a:r>
@@ -4896,6 +4470,7 @@
         <a:solidFill>
           <a:srgbClr val="F5F5F5"/>
         </a:solidFill>
+        <a:effectLst/>
       </p:bgPr>
     </p:bg>
     <p:spTree>
@@ -4933,7 +4508,7 @@
           <a:bodyPr wrap="square" rtlCol="0" anchor="ctr"/>
           <a:lstStyle/>
           <a:p>
-            <a:pPr indent="0" marL="0">
+            <a:pPr marL="0" indent="0">
               <a:buNone/>
             </a:pPr>
             <a:r>
@@ -4990,7 +4565,7 @@
           </a:solidFill>
           <a:ln/>
           <a:effectLst>
-            <a:outerShdw sx="100000" sy="100000" kx="0" ky="0" algn="bl" rotWithShape="0" blurRad="76200" dist="25400" dir="8100000">
+            <a:outerShdw blurRad="76200" dist="25400" dir="8100000" algn="bl" rotWithShape="0">
               <a:srgbClr val="000000">
                 <a:alpha val="10000"/>
               </a:srgbClr>
@@ -5019,7 +4594,7 @@
           <a:bodyPr wrap="square" rtlCol="0" anchor="ctr"/>
           <a:lstStyle/>
           <a:p>
-            <a:pPr indent="0" marL="0">
+            <a:pPr marL="0" indent="0">
               <a:buNone/>
             </a:pPr>
             <a:r>
@@ -5055,7 +4630,7 @@
           <a:bodyPr wrap="square" rtlCol="0" anchor="ctr"/>
           <a:lstStyle/>
           <a:p>
-            <a:pPr indent="0" marL="0">
+            <a:pPr marL="0" indent="0">
               <a:buNone/>
             </a:pPr>
             <a:r>
@@ -5109,7 +4684,7 @@
           </a:solidFill>
           <a:ln/>
           <a:effectLst>
-            <a:outerShdw sx="100000" sy="100000" kx="0" ky="0" algn="bl" rotWithShape="0" blurRad="76200" dist="25400" dir="8100000">
+            <a:outerShdw blurRad="76200" dist="25400" dir="8100000" algn="bl" rotWithShape="0">
               <a:srgbClr val="000000">
                 <a:alpha val="10000"/>
               </a:srgbClr>
@@ -5138,7 +4713,7 @@
           <a:bodyPr wrap="square" rtlCol="0" anchor="ctr"/>
           <a:lstStyle/>
           <a:p>
-            <a:pPr indent="0" marL="0">
+            <a:pPr marL="0" indent="0">
               <a:buNone/>
             </a:pPr>
             <a:r>
@@ -5174,7 +4749,7 @@
           <a:bodyPr wrap="square" rtlCol="0" anchor="ctr"/>
           <a:lstStyle/>
           <a:p>
-            <a:pPr indent="0" marL="0">
+            <a:pPr marL="0" indent="0">
               <a:buNone/>
             </a:pPr>
             <a:r>
@@ -5228,7 +4803,7 @@
           </a:solidFill>
           <a:ln/>
           <a:effectLst>
-            <a:outerShdw sx="100000" sy="100000" kx="0" ky="0" algn="bl" rotWithShape="0" blurRad="76200" dist="25400" dir="8100000">
+            <a:outerShdw blurRad="76200" dist="25400" dir="8100000" algn="bl" rotWithShape="0">
               <a:srgbClr val="000000">
                 <a:alpha val="10000"/>
               </a:srgbClr>
@@ -5257,7 +4832,7 @@
           <a:bodyPr wrap="square" rtlCol="0" anchor="ctr"/>
           <a:lstStyle/>
           <a:p>
-            <a:pPr indent="0" marL="0">
+            <a:pPr marL="0" indent="0">
               <a:buNone/>
             </a:pPr>
             <a:r>
@@ -5293,7 +4868,7 @@
           <a:bodyPr wrap="square" rtlCol="0" anchor="ctr"/>
           <a:lstStyle/>
           <a:p>
-            <a:pPr indent="0" marL="0">
+            <a:pPr marL="0" indent="0">
               <a:buNone/>
             </a:pPr>
             <a:r>
@@ -5347,7 +4922,7 @@
           </a:solidFill>
           <a:ln/>
           <a:effectLst>
-            <a:outerShdw sx="100000" sy="100000" kx="0" ky="0" algn="bl" rotWithShape="0" blurRad="76200" dist="25400" dir="8100000">
+            <a:outerShdw blurRad="76200" dist="25400" dir="8100000" algn="bl" rotWithShape="0">
               <a:srgbClr val="000000">
                 <a:alpha val="10000"/>
               </a:srgbClr>
@@ -5376,7 +4951,7 @@
           <a:bodyPr wrap="square" rtlCol="0" anchor="ctr"/>
           <a:lstStyle/>
           <a:p>
-            <a:pPr indent="0" marL="0">
+            <a:pPr marL="0" indent="0">
               <a:buNone/>
             </a:pPr>
             <a:r>
@@ -5412,7 +4987,7 @@
           <a:bodyPr wrap="square" rtlCol="0" anchor="ctr"/>
           <a:lstStyle/>
           <a:p>
-            <a:pPr indent="0" marL="0">
+            <a:pPr marL="0" indent="0">
               <a:buNone/>
             </a:pPr>
             <a:r>
@@ -5443,6 +5018,7 @@
         <a:solidFill>
           <a:srgbClr val="F5F5F5"/>
         </a:solidFill>
+        <a:effectLst/>
       </p:bgPr>
     </p:bg>
     <p:spTree>
@@ -5480,7 +5056,7 @@
           <a:bodyPr wrap="square" rtlCol="0" anchor="ctr"/>
           <a:lstStyle/>
           <a:p>
-            <a:pPr indent="0" marL="0">
+            <a:pPr marL="0" indent="0">
               <a:buNone/>
             </a:pPr>
             <a:r>
@@ -5517,7 +5093,7 @@
           </a:solidFill>
           <a:ln/>
           <a:effectLst>
-            <a:outerShdw sx="100000" sy="100000" kx="0" ky="0" algn="bl" rotWithShape="0" blurRad="76200" dist="25400" dir="8100000">
+            <a:outerShdw blurRad="76200" dist="25400" dir="8100000" algn="bl" rotWithShape="0">
               <a:srgbClr val="000000">
                 <a:alpha val="10000"/>
               </a:srgbClr>
@@ -5546,7 +5122,7 @@
           <a:bodyPr wrap="square" rtlCol="0" anchor="ctr"/>
           <a:lstStyle/>
           <a:p>
-            <a:pPr indent="0" marL="0">
+            <a:pPr marL="0" indent="0">
               <a:buNone/>
             </a:pPr>
             <a:r>
@@ -5647,7 +5223,7 @@
           </a:solidFill>
           <a:ln/>
           <a:effectLst>
-            <a:outerShdw sx="100000" sy="100000" kx="0" ky="0" algn="bl" rotWithShape="0" blurRad="76200" dist="25400" dir="8100000">
+            <a:outerShdw blurRad="76200" dist="25400" dir="8100000" algn="bl" rotWithShape="0">
               <a:srgbClr val="000000">
                 <a:alpha val="10000"/>
               </a:srgbClr>
@@ -5676,7 +5252,7 @@
           <a:bodyPr wrap="square" rtlCol="0" anchor="ctr"/>
           <a:lstStyle/>
           <a:p>
-            <a:pPr indent="0" marL="0">
+            <a:pPr marL="0" indent="0">
               <a:buNone/>
             </a:pPr>
             <a:r>
@@ -5712,7 +5288,7 @@
           <a:bodyPr wrap="square" rtlCol="0" anchor="ctr"/>
           <a:lstStyle/>
           <a:p>
-            <a:pPr indent="0" marL="0">
+            <a:pPr marL="0" indent="0">
               <a:buNone/>
             </a:pPr>
             <a:r>
@@ -5726,7 +5302,7 @@
             <a:endParaRPr lang="en-US" sz="1400" dirty="0"/>
           </a:p>
           <a:p>
-            <a:pPr indent="0" marL="0">
+            <a:pPr marL="0" indent="0">
               <a:buNone/>
             </a:pPr>
             <a:r>
@@ -5740,7 +5316,7 @@
             <a:endParaRPr lang="en-US" sz="1400" dirty="0"/>
           </a:p>
           <a:p>
-            <a:pPr indent="0" marL="0">
+            <a:pPr marL="0" indent="0">
               <a:buNone/>
             </a:pPr>
             <a:r>
@@ -5754,7 +5330,7 @@
             <a:endParaRPr lang="en-US" sz="1400" dirty="0"/>
           </a:p>
           <a:p>
-            <a:pPr indent="0" marL="0">
+            <a:pPr marL="0" indent="0">
               <a:buNone/>
             </a:pPr>
             <a:r>
@@ -5790,7 +5366,7 @@
           <a:bodyPr wrap="square" rtlCol="0" anchor="ctr"/>
           <a:lstStyle/>
           <a:p>
-            <a:pPr algn="ctr" indent="0" marL="0">
+            <a:pPr marL="0" indent="0" algn="ctr">
               <a:buNone/>
             </a:pPr>
             <a:r>
@@ -5821,6 +5397,7 @@
         <a:solidFill>
           <a:srgbClr val="F5F5F5"/>
         </a:solidFill>
+        <a:effectLst/>
       </p:bgPr>
     </p:bg>
     <p:spTree>
@@ -5858,7 +5435,7 @@
           <a:bodyPr wrap="square" rtlCol="0" anchor="ctr"/>
           <a:lstStyle/>
           <a:p>
-            <a:pPr indent="0" marL="0">
+            <a:pPr marL="0" indent="0">
               <a:buNone/>
             </a:pPr>
             <a:r>
@@ -5878,14 +5455,14 @@
       </p:sp>
       <p:pic>
         <p:nvPicPr>
-          <p:cNvPr id="3" name="Image 0" descr="preencoded.png">    </p:cNvPr>
+          <p:cNvPr id="3" name="Image 0" descr="preencoded.png"/>
           <p:cNvPicPr>
             <a:picLocks noChangeAspect="1"/>
           </p:cNvPicPr>
           <p:nvPr/>
         </p:nvPicPr>
         <p:blipFill>
-          <a:blip r:embed="rId1"/>
+          <a:blip r:embed="rId3"/>
           <a:stretch>
             <a:fillRect/>
           </a:stretch>
@@ -5919,7 +5496,7 @@
           </a:solidFill>
           <a:ln/>
           <a:effectLst>
-            <a:outerShdw sx="100000" sy="100000" kx="0" ky="0" algn="bl" rotWithShape="0" blurRad="76200" dist="25400" dir="8100000">
+            <a:outerShdw blurRad="76200" dist="25400" dir="8100000" algn="bl" rotWithShape="0">
               <a:srgbClr val="000000">
                 <a:alpha val="10000"/>
               </a:srgbClr>
@@ -5948,7 +5525,7 @@
           <a:bodyPr wrap="square" rtlCol="0" anchor="ctr"/>
           <a:lstStyle/>
           <a:p>
-            <a:pPr algn="ctr" indent="0" marL="0">
+            <a:pPr marL="0" indent="0" algn="ctr">
               <a:buNone/>
             </a:pPr>
             <a:r>
@@ -6002,7 +5579,7 @@
           </a:solidFill>
           <a:ln/>
           <a:effectLst>
-            <a:outerShdw sx="100000" sy="100000" kx="0" ky="0" algn="bl" rotWithShape="0" blurRad="76200" dist="25400" dir="8100000">
+            <a:outerShdw blurRad="76200" dist="25400" dir="8100000" algn="bl" rotWithShape="0">
               <a:srgbClr val="000000">
                 <a:alpha val="10000"/>
               </a:srgbClr>
@@ -6031,7 +5608,7 @@
           <a:bodyPr wrap="square" rtlCol="0" anchor="ctr"/>
           <a:lstStyle/>
           <a:p>
-            <a:pPr algn="ctr" indent="0" marL="0">
+            <a:pPr marL="0" indent="0" algn="ctr">
               <a:buNone/>
             </a:pPr>
             <a:r>
@@ -6085,7 +5662,7 @@
           </a:solidFill>
           <a:ln/>
           <a:effectLst>
-            <a:outerShdw sx="100000" sy="100000" kx="0" ky="0" algn="bl" rotWithShape="0" blurRad="76200" dist="25400" dir="8100000">
+            <a:outerShdw blurRad="76200" dist="25400" dir="8100000" algn="bl" rotWithShape="0">
               <a:srgbClr val="000000">
                 <a:alpha val="10000"/>
               </a:srgbClr>
@@ -6114,7 +5691,7 @@
           <a:bodyPr wrap="square" rtlCol="0" anchor="ctr"/>
           <a:lstStyle/>
           <a:p>
-            <a:pPr algn="ctr" indent="0" marL="0">
+            <a:pPr marL="0" indent="0" algn="ctr">
               <a:buNone/>
             </a:pPr>
             <a:r>
@@ -6168,7 +5745,7 @@
           </a:solidFill>
           <a:ln/>
           <a:effectLst>
-            <a:outerShdw sx="100000" sy="100000" kx="0" ky="0" algn="bl" rotWithShape="0" blurRad="76200" dist="25400" dir="8100000">
+            <a:outerShdw blurRad="76200" dist="25400" dir="8100000" algn="bl" rotWithShape="0">
               <a:srgbClr val="000000">
                 <a:alpha val="10000"/>
               </a:srgbClr>
@@ -6197,7 +5774,7 @@
           <a:bodyPr wrap="square" rtlCol="0" anchor="ctr"/>
           <a:lstStyle/>
           <a:p>
-            <a:pPr algn="ctr" indent="0" marL="0">
+            <a:pPr marL="0" indent="0" algn="ctr">
               <a:buNone/>
             </a:pPr>
             <a:r>
@@ -6251,7 +5828,7 @@
           </a:solidFill>
           <a:ln/>
           <a:effectLst>
-            <a:outerShdw sx="100000" sy="100000" kx="0" ky="0" algn="bl" rotWithShape="0" blurRad="76200" dist="25400" dir="8100000">
+            <a:outerShdw blurRad="76200" dist="25400" dir="8100000" algn="bl" rotWithShape="0">
               <a:srgbClr val="000000">
                 <a:alpha val="10000"/>
               </a:srgbClr>
@@ -6280,7 +5857,7 @@
           <a:bodyPr wrap="square" rtlCol="0" anchor="ctr"/>
           <a:lstStyle/>
           <a:p>
-            <a:pPr algn="ctr" indent="0" marL="0">
+            <a:pPr marL="0" indent="0" algn="ctr">
               <a:buNone/>
             </a:pPr>
             <a:r>
@@ -6334,7 +5911,7 @@
           </a:solidFill>
           <a:ln/>
           <a:effectLst>
-            <a:outerShdw sx="100000" sy="100000" kx="0" ky="0" algn="bl" rotWithShape="0" blurRad="76200" dist="25400" dir="8100000">
+            <a:outerShdw blurRad="76200" dist="25400" dir="8100000" algn="bl" rotWithShape="0">
               <a:srgbClr val="000000">
                 <a:alpha val="10000"/>
               </a:srgbClr>
@@ -6363,7 +5940,7 @@
           <a:bodyPr wrap="square" rtlCol="0" anchor="ctr"/>
           <a:lstStyle/>
           <a:p>
-            <a:pPr algn="ctr" indent="0" marL="0">
+            <a:pPr marL="0" indent="0" algn="ctr">
               <a:buNone/>
             </a:pPr>
             <a:r>
@@ -6399,7 +5976,7 @@
           <a:bodyPr wrap="square" rtlCol="0" anchor="ctr"/>
           <a:lstStyle/>
           <a:p>
-            <a:pPr algn="ctr" indent="0" marL="0">
+            <a:pPr marL="0" indent="0" algn="ctr">
               <a:buNone/>
             </a:pPr>
             <a:r>
@@ -6430,6 +6007,7 @@
         <a:solidFill>
           <a:srgbClr val="F5F5F5"/>
         </a:solidFill>
+        <a:effectLst/>
       </p:bgPr>
     </p:bg>
     <p:spTree>
@@ -6467,7 +6045,7 @@
           <a:bodyPr wrap="square" rtlCol="0" anchor="ctr"/>
           <a:lstStyle/>
           <a:p>
-            <a:pPr indent="0" marL="0">
+            <a:pPr marL="0" indent="0">
               <a:buNone/>
             </a:pPr>
             <a:r>
@@ -6487,14 +6065,14 @@
       </p:sp>
       <p:pic>
         <p:nvPicPr>
-          <p:cNvPr id="3" name="Image 0" descr="preencoded.png">    </p:cNvPr>
+          <p:cNvPr id="3" name="Image 0" descr="preencoded.png"/>
           <p:cNvPicPr>
             <a:picLocks noChangeAspect="1"/>
           </p:cNvPicPr>
           <p:nvPr/>
         </p:nvPicPr>
         <p:blipFill>
-          <a:blip r:embed="rId1"/>
+          <a:blip r:embed="rId3"/>
           <a:stretch>
             <a:fillRect/>
           </a:stretch>
@@ -6528,7 +6106,7 @@
           </a:solidFill>
           <a:ln/>
           <a:effectLst>
-            <a:outerShdw sx="100000" sy="100000" kx="0" ky="0" algn="bl" rotWithShape="0" blurRad="76200" dist="25400" dir="8100000">
+            <a:outerShdw blurRad="76200" dist="25400" dir="8100000" algn="bl" rotWithShape="0">
               <a:srgbClr val="000000">
                 <a:alpha val="10000"/>
               </a:srgbClr>
@@ -6557,7 +6135,7 @@
           <a:bodyPr wrap="square" rtlCol="0" anchor="ctr"/>
           <a:lstStyle/>
           <a:p>
-            <a:pPr indent="0" marL="0">
+            <a:pPr marL="0" indent="0">
               <a:buNone/>
             </a:pPr>
             <a:r>
@@ -6593,7 +6171,7 @@
           <a:bodyPr wrap="square" rtlCol="0" anchor="ctr"/>
           <a:lstStyle/>
           <a:p>
-            <a:pPr indent="0" marL="0">
+            <a:pPr marL="0" indent="0">
               <a:buNone/>
             </a:pPr>
             <a:r>
@@ -6604,9 +6182,6 @@
               </a:rPr>
               <a:t>Purpose:</a:t>
             </a:r>
-            <a:pPr indent="0" marL="0">
-              <a:buNone/>
-            </a:pPr>
             <a:r>
               <a:rPr lang="en-US" sz="1200" dirty="0">
                 <a:solidFill>
@@ -6618,7 +6193,7 @@
             <a:endParaRPr lang="en-US" sz="1200" dirty="0"/>
           </a:p>
           <a:p>
-            <a:pPr indent="0" marL="0">
+            <a:pPr marL="0" indent="0">
               <a:buNone/>
             </a:pPr>
             <a:r>
@@ -6632,7 +6207,7 @@
             <a:endParaRPr lang="en-US" sz="1200" dirty="0"/>
           </a:p>
           <a:p>
-            <a:pPr indent="0" marL="0">
+            <a:pPr marL="0" indent="0">
               <a:buNone/>
             </a:pPr>
             <a:r>
@@ -6646,7 +6221,7 @@
             <a:endParaRPr lang="en-US" sz="1200" dirty="0"/>
           </a:p>
           <a:p>
-            <a:pPr indent="0" marL="0">
+            <a:pPr marL="0" indent="0">
               <a:buNone/>
             </a:pPr>
             <a:r>
@@ -6660,7 +6235,7 @@
             <a:endParaRPr lang="en-US" sz="1200" dirty="0"/>
           </a:p>
           <a:p>
-            <a:pPr indent="0" marL="0">
+            <a:pPr marL="0" indent="0">
               <a:buNone/>
             </a:pPr>
             <a:r>
@@ -6674,7 +6249,7 @@
             <a:endParaRPr lang="en-US" sz="1200" dirty="0"/>
           </a:p>
           <a:p>
-            <a:pPr indent="0" marL="0">
+            <a:pPr marL="0" indent="0">
               <a:buNone/>
             </a:pPr>
             <a:r>
@@ -6685,9 +6260,6 @@
               </a:rPr>
               <a:t>Target Labels:</a:t>
             </a:r>
-            <a:pPr indent="0" marL="0">
-              <a:buNone/>
-            </a:pPr>
             <a:r>
               <a:rPr lang="en-US" sz="1200" dirty="0">
                 <a:solidFill>
@@ -6719,7 +6291,7 @@
           </a:solidFill>
           <a:ln/>
           <a:effectLst>
-            <a:outerShdw sx="100000" sy="100000" kx="0" ky="0" algn="bl" rotWithShape="0" blurRad="76200" dist="25400" dir="8100000">
+            <a:outerShdw blurRad="76200" dist="25400" dir="8100000" algn="bl" rotWithShape="0">
               <a:srgbClr val="000000">
                 <a:alpha val="10000"/>
               </a:srgbClr>
@@ -6748,7 +6320,7 @@
           <a:bodyPr wrap="square" rtlCol="0" anchor="ctr"/>
           <a:lstStyle/>
           <a:p>
-            <a:pPr indent="0" marL="0">
+            <a:pPr marL="0" indent="0">
               <a:buNone/>
             </a:pPr>
             <a:r>
@@ -6784,7 +6356,7 @@
           <a:bodyPr wrap="square" rtlCol="0" anchor="ctr"/>
           <a:lstStyle/>
           <a:p>
-            <a:pPr indent="0" marL="0">
+            <a:pPr marL="0" indent="0">
               <a:buNone/>
             </a:pPr>
             <a:r>
@@ -6795,9 +6367,6 @@
               </a:rPr>
               <a:t>Purpose:</a:t>
             </a:r>
-            <a:pPr indent="0" marL="0">
-              <a:buNone/>
-            </a:pPr>
             <a:r>
               <a:rPr lang="en-US" sz="1200" dirty="0">
                 <a:solidFill>
@@ -6809,7 +6378,7 @@
             <a:endParaRPr lang="en-US" sz="1200" dirty="0"/>
           </a:p>
           <a:p>
-            <a:pPr indent="0" marL="0">
+            <a:pPr marL="0" indent="0">
               <a:buNone/>
             </a:pPr>
             <a:r>
@@ -6823,7 +6392,7 @@
             <a:endParaRPr lang="en-US" sz="1200" dirty="0"/>
           </a:p>
           <a:p>
-            <a:pPr indent="0" marL="0">
+            <a:pPr marL="0" indent="0">
               <a:buNone/>
             </a:pPr>
             <a:r>
@@ -6837,7 +6406,7 @@
             <a:endParaRPr lang="en-US" sz="1200" dirty="0"/>
           </a:p>
           <a:p>
-            <a:pPr indent="0" marL="0">
+            <a:pPr marL="0" indent="0">
               <a:buNone/>
             </a:pPr>
             <a:r>
@@ -6851,7 +6420,7 @@
             <a:endParaRPr lang="en-US" sz="1200" dirty="0"/>
           </a:p>
           <a:p>
-            <a:pPr indent="0" marL="0">
+            <a:pPr marL="0" indent="0">
               <a:buNone/>
             </a:pPr>
             <a:r>
@@ -6865,7 +6434,7 @@
             <a:endParaRPr lang="en-US" sz="1200" dirty="0"/>
           </a:p>
           <a:p>
-            <a:pPr indent="0" marL="0">
+            <a:pPr marL="0" indent="0">
               <a:buNone/>
             </a:pPr>
             <a:r>
@@ -6876,9 +6445,6 @@
               </a:rPr>
               <a:t>Target Variable:</a:t>
             </a:r>
-            <a:pPr indent="0" marL="0">
-              <a:buNone/>
-            </a:pPr>
             <a:r>
               <a:rPr lang="en-US" sz="1200" dirty="0">
                 <a:solidFill>
@@ -6912,7 +6478,7 @@
           <a:bodyPr wrap="square" rtlCol="0" anchor="ctr"/>
           <a:lstStyle/>
           <a:p>
-            <a:pPr algn="ctr" indent="0" marL="0">
+            <a:pPr marL="0" indent="0" algn="ctr">
               <a:buNone/>
             </a:pPr>
             <a:r>
@@ -6943,6 +6509,7 @@
         <a:solidFill>
           <a:srgbClr val="F5F5F5"/>
         </a:solidFill>
+        <a:effectLst/>
       </p:bgPr>
     </p:bg>
     <p:spTree>
@@ -6980,7 +6547,7 @@
           <a:bodyPr wrap="square" rtlCol="0" anchor="ctr"/>
           <a:lstStyle/>
           <a:p>
-            <a:pPr indent="0" marL="0">
+            <a:pPr marL="0" indent="0">
               <a:buNone/>
             </a:pPr>
             <a:r>
@@ -7000,14 +6567,14 @@
       </p:sp>
       <p:pic>
         <p:nvPicPr>
-          <p:cNvPr id="3" name="Image 0" descr="preencoded.png">    </p:cNvPr>
+          <p:cNvPr id="3" name="Image 0" descr="preencoded.png"/>
           <p:cNvPicPr>
             <a:picLocks noChangeAspect="1"/>
           </p:cNvPicPr>
           <p:nvPr/>
         </p:nvPicPr>
         <p:blipFill>
-          <a:blip r:embed="rId1"/>
+          <a:blip r:embed="rId3"/>
           <a:stretch>
             <a:fillRect/>
           </a:stretch>
@@ -7041,7 +6608,7 @@
           </a:solidFill>
           <a:ln/>
           <a:effectLst>
-            <a:outerShdw sx="100000" sy="100000" kx="0" ky="0" algn="bl" rotWithShape="0" blurRad="76200" dist="25400" dir="8100000">
+            <a:outerShdw blurRad="76200" dist="25400" dir="8100000" algn="bl" rotWithShape="0">
               <a:srgbClr val="000000">
                 <a:alpha val="10000"/>
               </a:srgbClr>
@@ -7070,7 +6637,7 @@
           <a:bodyPr wrap="square" rtlCol="0" anchor="ctr"/>
           <a:lstStyle/>
           <a:p>
-            <a:pPr indent="0" marL="0">
+            <a:pPr marL="0" indent="0">
               <a:buNone/>
             </a:pPr>
             <a:r>
@@ -7081,9 +6648,6 @@
               </a:rPr>
               <a:t>Algorithm: </a:t>
             </a:r>
-            <a:pPr indent="0" marL="0">
-              <a:buNone/>
-            </a:pPr>
             <a:r>
               <a:rPr lang="en-US" sz="1800" dirty="0">
                 <a:solidFill>
@@ -7117,7 +6681,7 @@
           <a:bodyPr wrap="square" rtlCol="0" anchor="ctr"/>
           <a:lstStyle/>
           <a:p>
-            <a:pPr indent="0" marL="0">
+            <a:pPr marL="0" indent="0">
               <a:buNone/>
             </a:pPr>
             <a:r>
@@ -7153,7 +6717,7 @@
           <a:bodyPr wrap="square" rtlCol="0" anchor="ctr"/>
           <a:lstStyle/>
           <a:p>
-            <a:pPr indent="0" marL="0">
+            <a:pPr marL="0" indent="0">
               <a:buNone/>
             </a:pPr>
             <a:r>
@@ -7187,7 +6751,7 @@
           </a:solidFill>
           <a:ln/>
           <a:effectLst>
-            <a:outerShdw sx="100000" sy="100000" kx="0" ky="0" algn="bl" rotWithShape="0" blurRad="76200" dist="25400" dir="8100000">
+            <a:outerShdw blurRad="76200" dist="25400" dir="8100000" algn="bl" rotWithShape="0">
               <a:srgbClr val="000000">
                 <a:alpha val="10000"/>
               </a:srgbClr>
@@ -7216,7 +6780,7 @@
           <a:bodyPr wrap="square" rtlCol="0" anchor="ctr"/>
           <a:lstStyle/>
           <a:p>
-            <a:pPr indent="0" marL="0">
+            <a:pPr marL="0" indent="0">
               <a:buNone/>
             </a:pPr>
             <a:r>
@@ -7252,7 +6816,7 @@
           <a:bodyPr wrap="square" rtlCol="0" anchor="ctr"/>
           <a:lstStyle/>
           <a:p>
-            <a:pPr indent="0" marL="0">
+            <a:pPr marL="0" indent="0">
               <a:buNone/>
             </a:pPr>
             <a:r>
@@ -7266,7 +6830,7 @@
             <a:endParaRPr lang="en-US" sz="1300" dirty="0"/>
           </a:p>
           <a:p>
-            <a:pPr indent="0" marL="0">
+            <a:pPr marL="0" indent="0">
               <a:buNone/>
             </a:pPr>
             <a:r>
@@ -7280,7 +6844,7 @@
             <a:endParaRPr lang="en-US" sz="1300" dirty="0"/>
           </a:p>
           <a:p>
-            <a:pPr indent="0" marL="0">
+            <a:pPr marL="0" indent="0">
               <a:buNone/>
             </a:pPr>
             <a:r>
@@ -7294,7 +6858,7 @@
             <a:endParaRPr lang="en-US" sz="1300" dirty="0"/>
           </a:p>
           <a:p>
-            <a:pPr indent="0" marL="0">
+            <a:pPr marL="0" indent="0">
               <a:buNone/>
             </a:pPr>
             <a:r>
@@ -7308,7 +6872,7 @@
             <a:endParaRPr lang="en-US" sz="1300" dirty="0"/>
           </a:p>
           <a:p>
-            <a:pPr indent="0" marL="0">
+            <a:pPr marL="0" indent="0">
               <a:buNone/>
             </a:pPr>
             <a:r>
@@ -7342,7 +6906,7 @@
           </a:solidFill>
           <a:ln/>
           <a:effectLst>
-            <a:outerShdw sx="100000" sy="100000" kx="0" ky="0" algn="bl" rotWithShape="0" blurRad="76200" dist="25400" dir="8100000">
+            <a:outerShdw blurRad="76200" dist="25400" dir="8100000" algn="bl" rotWithShape="0">
               <a:srgbClr val="000000">
                 <a:alpha val="10000"/>
               </a:srgbClr>
@@ -7371,7 +6935,7 @@
           <a:bodyPr wrap="square" rtlCol="0" anchor="ctr"/>
           <a:lstStyle/>
           <a:p>
-            <a:pPr indent="0" marL="0">
+            <a:pPr marL="0" indent="0">
               <a:buNone/>
             </a:pPr>
             <a:r>
@@ -7407,7 +6971,7 @@
           <a:bodyPr wrap="square" rtlCol="0" anchor="ctr"/>
           <a:lstStyle/>
           <a:p>
-            <a:pPr indent="0" marL="0">
+            <a:pPr marL="0" indent="0">
               <a:buNone/>
             </a:pPr>
             <a:r>
@@ -7421,7 +6985,7 @@
             <a:endParaRPr lang="en-US" sz="1400" dirty="0"/>
           </a:p>
           <a:p>
-            <a:pPr indent="0" marL="0">
+            <a:pPr marL="0" indent="0">
               <a:buNone/>
             </a:pPr>
             <a:r>
@@ -7435,7 +6999,7 @@
             <a:endParaRPr lang="en-US" sz="1400" dirty="0"/>
           </a:p>
           <a:p>
-            <a:pPr indent="0" marL="0">
+            <a:pPr marL="0" indent="0">
               <a:buNone/>
             </a:pPr>
             <a:r>
@@ -7449,7 +7013,7 @@
             <a:endParaRPr lang="en-US" sz="1400" dirty="0"/>
           </a:p>
           <a:p>
-            <a:pPr indent="0" marL="0">
+            <a:pPr marL="0" indent="0">
               <a:buNone/>
             </a:pPr>
             <a:r>
@@ -7480,6 +7044,7 @@
         <a:solidFill>
           <a:srgbClr val="F5F5F5"/>
         </a:solidFill>
+        <a:effectLst/>
       </p:bgPr>
     </p:bg>
     <p:spTree>
@@ -7517,7 +7082,7 @@
           <a:bodyPr wrap="square" rtlCol="0" anchor="ctr"/>
           <a:lstStyle/>
           <a:p>
-            <a:pPr indent="0" marL="0">
+            <a:pPr marL="0" indent="0">
               <a:buNone/>
             </a:pPr>
             <a:r>
@@ -7537,14 +7102,14 @@
       </p:sp>
       <p:pic>
         <p:nvPicPr>
-          <p:cNvPr id="3" name="Image 0" descr="preencoded.png">    </p:cNvPr>
+          <p:cNvPr id="3" name="Image 0" descr="preencoded.png"/>
           <p:cNvPicPr>
             <a:picLocks noChangeAspect="1"/>
           </p:cNvPicPr>
           <p:nvPr/>
         </p:nvPicPr>
         <p:blipFill>
-          <a:blip r:embed="rId1"/>
+          <a:blip r:embed="rId3"/>
           <a:stretch>
             <a:fillRect/>
           </a:stretch>
@@ -7578,7 +7143,7 @@
           </a:solidFill>
           <a:ln/>
           <a:effectLst>
-            <a:outerShdw sx="100000" sy="100000" kx="0" ky="0" algn="bl" rotWithShape="0" blurRad="76200" dist="25400" dir="8100000">
+            <a:outerShdw blurRad="76200" dist="25400" dir="8100000" algn="bl" rotWithShape="0">
               <a:srgbClr val="000000">
                 <a:alpha val="10000"/>
               </a:srgbClr>
@@ -7607,7 +7172,7 @@
           <a:bodyPr wrap="square" rtlCol="0" anchor="ctr"/>
           <a:lstStyle/>
           <a:p>
-            <a:pPr indent="0" marL="0">
+            <a:pPr marL="0" indent="0">
               <a:buNone/>
             </a:pPr>
             <a:r>
@@ -7618,9 +7183,6 @@
               </a:rPr>
               <a:t>Algorithm: </a:t>
             </a:r>
-            <a:pPr indent="0" marL="0">
-              <a:buNone/>
-            </a:pPr>
             <a:r>
               <a:rPr lang="en-US" sz="1800" dirty="0">
                 <a:solidFill>
@@ -7654,7 +7216,7 @@
           <a:bodyPr wrap="square" rtlCol="0" anchor="ctr"/>
           <a:lstStyle/>
           <a:p>
-            <a:pPr indent="0" marL="0">
+            <a:pPr marL="0" indent="0">
               <a:buNone/>
             </a:pPr>
             <a:r>
@@ -7690,7 +7252,7 @@
           <a:bodyPr wrap="square" rtlCol="0" anchor="ctr"/>
           <a:lstStyle/>
           <a:p>
-            <a:pPr indent="0" marL="0">
+            <a:pPr marL="0" indent="0">
               <a:buNone/>
             </a:pPr>
             <a:r>
@@ -7724,7 +7286,7 @@
           </a:solidFill>
           <a:ln/>
           <a:effectLst>
-            <a:outerShdw sx="100000" sy="100000" kx="0" ky="0" algn="bl" rotWithShape="0" blurRad="76200" dist="25400" dir="8100000">
+            <a:outerShdw blurRad="76200" dist="25400" dir="8100000" algn="bl" rotWithShape="0">
               <a:srgbClr val="000000">
                 <a:alpha val="10000"/>
               </a:srgbClr>
@@ -7753,7 +7315,7 @@
           <a:bodyPr wrap="square" rtlCol="0" anchor="ctr"/>
           <a:lstStyle/>
           <a:p>
-            <a:pPr indent="0" marL="0">
+            <a:pPr marL="0" indent="0">
               <a:buNone/>
             </a:pPr>
             <a:r>
@@ -7789,7 +7351,7 @@
           <a:bodyPr wrap="square" rtlCol="0" anchor="ctr"/>
           <a:lstStyle/>
           <a:p>
-            <a:pPr indent="0" marL="0">
+            <a:pPr marL="0" indent="0">
               <a:buNone/>
             </a:pPr>
             <a:r>
@@ -7803,7 +7365,7 @@
             <a:endParaRPr lang="en-US" sz="1300" dirty="0"/>
           </a:p>
           <a:p>
-            <a:pPr indent="0" marL="0">
+            <a:pPr marL="0" indent="0">
               <a:buNone/>
             </a:pPr>
             <a:r>
@@ -7817,7 +7379,7 @@
             <a:endParaRPr lang="en-US" sz="1300" dirty="0"/>
           </a:p>
           <a:p>
-            <a:pPr indent="0" marL="0">
+            <a:pPr marL="0" indent="0">
               <a:buNone/>
             </a:pPr>
             <a:r>
@@ -7831,7 +7393,7 @@
             <a:endParaRPr lang="en-US" sz="1300" dirty="0"/>
           </a:p>
           <a:p>
-            <a:pPr indent="0" marL="0">
+            <a:pPr marL="0" indent="0">
               <a:buNone/>
             </a:pPr>
             <a:r>
@@ -7842,9 +7404,6 @@
               </a:rPr>
               <a:t>• </a:t>
             </a:r>
-            <a:pPr indent="0" marL="0">
-              <a:buNone/>
-            </a:pPr>
             <a:r>
               <a:rPr lang="en-US" sz="1300" b="1" dirty="0">
                 <a:solidFill>
@@ -7876,7 +7435,7 @@
           </a:solidFill>
           <a:ln/>
           <a:effectLst>
-            <a:outerShdw sx="100000" sy="100000" kx="0" ky="0" algn="bl" rotWithShape="0" blurRad="76200" dist="25400" dir="8100000">
+            <a:outerShdw blurRad="76200" dist="25400" dir="8100000" algn="bl" rotWithShape="0">
               <a:srgbClr val="000000">
                 <a:alpha val="10000"/>
               </a:srgbClr>
@@ -7905,7 +7464,7 @@
           <a:bodyPr wrap="square" rtlCol="0" anchor="ctr"/>
           <a:lstStyle/>
           <a:p>
-            <a:pPr indent="0" marL="0">
+            <a:pPr marL="0" indent="0">
               <a:buNone/>
             </a:pPr>
             <a:r>
@@ -7941,7 +7500,7 @@
           <a:bodyPr wrap="square" rtlCol="0" anchor="ctr"/>
           <a:lstStyle/>
           <a:p>
-            <a:pPr indent="0" marL="0">
+            <a:pPr marL="0" indent="0">
               <a:buNone/>
             </a:pPr>
             <a:r>
@@ -7952,9 +7511,6 @@
               </a:rPr>
               <a:t>Only non-spam emails</a:t>
             </a:r>
-            <a:pPr indent="0" marL="0">
-              <a:buNone/>
-            </a:pPr>
             <a:r>
               <a:rPr lang="en-US" sz="1400" dirty="0">
                 <a:solidFill>
@@ -7966,7 +7522,7 @@
             <a:endParaRPr lang="en-US" sz="1400" dirty="0"/>
           </a:p>
           <a:p>
-            <a:pPr indent="0" marL="0">
+            <a:pPr marL="0" indent="0">
               <a:buNone/>
             </a:pPr>
             <a:r>
@@ -7980,7 +7536,7 @@
             <a:endParaRPr lang="en-US" sz="1400" dirty="0"/>
           </a:p>
           <a:p>
-            <a:pPr indent="0" marL="0">
+            <a:pPr marL="0" indent="0">
               <a:buNone/>
             </a:pPr>
             <a:r>
@@ -7994,7 +7550,7 @@
             <a:endParaRPr lang="en-US" sz="1400" dirty="0"/>
           </a:p>
           <a:p>
-            <a:pPr indent="0" marL="0">
+            <a:pPr marL="0" indent="0">
               <a:buNone/>
             </a:pPr>
             <a:r>
@@ -8310,4 +7866,299 @@
     </a:ext>
   </a:extLst>
 </a:theme>
+</file>
+
+<file path=ppt/theme/theme2.xml><?xml version="1.0" encoding="utf-8"?>
+<a:theme xmlns:a="http://schemas.openxmlformats.org/drawingml/2006/main" name="Office Theme">
+  <a:themeElements>
+    <a:clrScheme name="Office">
+      <a:dk1>
+        <a:sysClr val="windowText" lastClr="000000"/>
+      </a:dk1>
+      <a:lt1>
+        <a:sysClr val="window" lastClr="FFFFFF"/>
+      </a:lt1>
+      <a:dk2>
+        <a:srgbClr val="44546A"/>
+      </a:dk2>
+      <a:lt2>
+        <a:srgbClr val="E7E6E6"/>
+      </a:lt2>
+      <a:accent1>
+        <a:srgbClr val="4472C4"/>
+      </a:accent1>
+      <a:accent2>
+        <a:srgbClr val="ED7D31"/>
+      </a:accent2>
+      <a:accent3>
+        <a:srgbClr val="A5A5A5"/>
+      </a:accent3>
+      <a:accent4>
+        <a:srgbClr val="FFC000"/>
+      </a:accent4>
+      <a:accent5>
+        <a:srgbClr val="5B9BD5"/>
+      </a:accent5>
+      <a:accent6>
+        <a:srgbClr val="70AD47"/>
+      </a:accent6>
+      <a:hlink>
+        <a:srgbClr val="0563C1"/>
+      </a:hlink>
+      <a:folHlink>
+        <a:srgbClr val="954F72"/>
+      </a:folHlink>
+    </a:clrScheme>
+    <a:fontScheme name="Office">
+      <a:majorFont>
+        <a:latin typeface="Calibri Light" panose="020F0302020204030204"/>
+        <a:ea typeface=""/>
+        <a:cs typeface=""/>
+        <a:font script="Jpan" typeface="游ゴシック Light"/>
+        <a:font script="Hang" typeface="맑은 고딕"/>
+        <a:font script="Hans" typeface="等线 Light"/>
+        <a:font script="Hant" typeface="新細明體"/>
+        <a:font script="Arab" typeface="Times New Roman"/>
+        <a:font script="Hebr" typeface="Times New Roman"/>
+        <a:font script="Thai" typeface="Angsana New"/>
+        <a:font script="Ethi" typeface="Nyala"/>
+        <a:font script="Beng" typeface="Vrinda"/>
+        <a:font script="Gujr" typeface="Shruti"/>
+        <a:font script="Khmr" typeface="MoolBoran"/>
+        <a:font script="Knda" typeface="Tunga"/>
+        <a:font script="Guru" typeface="Raavi"/>
+        <a:font script="Cans" typeface="Euphemia"/>
+        <a:font script="Cher" typeface="Plantagenet Cherokee"/>
+        <a:font script="Yiii" typeface="Microsoft Yi Baiti"/>
+        <a:font script="Tibt" typeface="Microsoft Himalaya"/>
+        <a:font script="Thaa" typeface="MV Boli"/>
+        <a:font script="Deva" typeface="Mangal"/>
+        <a:font script="Telu" typeface="Gautami"/>
+        <a:font script="Taml" typeface="Latha"/>
+        <a:font script="Syrc" typeface="Estrangelo Edessa"/>
+        <a:font script="Orya" typeface="Kalinga"/>
+        <a:font script="Mlym" typeface="Kartika"/>
+        <a:font script="Laoo" typeface="DokChampa"/>
+        <a:font script="Sinh" typeface="Iskoola Pota"/>
+        <a:font script="Mong" typeface="Mongolian Baiti"/>
+        <a:font script="Viet" typeface="Times New Roman"/>
+        <a:font script="Uigh" typeface="Microsoft Uighur"/>
+        <a:font script="Geor" typeface="Sylfaen"/>
+        <a:font script="Armn" typeface="Arial"/>
+        <a:font script="Bugi" typeface="Leelawadee UI"/>
+        <a:font script="Bopo" typeface="Microsoft JhengHei"/>
+        <a:font script="Java" typeface="Javanese Text"/>
+        <a:font script="Lisu" typeface="Segoe UI"/>
+        <a:font script="Mymr" typeface="Myanmar Text"/>
+        <a:font script="Nkoo" typeface="Ebrima"/>
+        <a:font script="Olck" typeface="Nirmala UI"/>
+        <a:font script="Osma" typeface="Ebrima"/>
+        <a:font script="Phag" typeface="Phagspa"/>
+        <a:font script="Syrn" typeface="Estrangelo Edessa"/>
+        <a:font script="Syrj" typeface="Estrangelo Edessa"/>
+        <a:font script="Syre" typeface="Estrangelo Edessa"/>
+        <a:font script="Sora" typeface="Nirmala UI"/>
+        <a:font script="Tale" typeface="Microsoft Tai Le"/>
+        <a:font script="Talu" typeface="Microsoft New Tai Lue"/>
+        <a:font script="Tfng" typeface="Ebrima"/>
+      </a:majorFont>
+      <a:minorFont>
+        <a:latin typeface="Calibri" panose="020F0502020204030204"/>
+        <a:ea typeface=""/>
+        <a:cs typeface=""/>
+        <a:font script="Jpan" typeface="游ゴシック"/>
+        <a:font script="Hang" typeface="맑은 고딕"/>
+        <a:font script="Hans" typeface="等线"/>
+        <a:font script="Hant" typeface="新細明體"/>
+        <a:font script="Arab" typeface="Arial"/>
+        <a:font script="Hebr" typeface="Arial"/>
+        <a:font script="Thai" typeface="Cordia New"/>
+        <a:font script="Ethi" typeface="Nyala"/>
+        <a:font script="Beng" typeface="Vrinda"/>
+        <a:font script="Gujr" typeface="Shruti"/>
+        <a:font script="Khmr" typeface="DaunPenh"/>
+        <a:font script="Knda" typeface="Tunga"/>
+        <a:font script="Guru" typeface="Raavi"/>
+        <a:font script="Cans" typeface="Euphemia"/>
+        <a:font script="Cher" typeface="Plantagenet Cherokee"/>
+        <a:font script="Yiii" typeface="Microsoft Yi Baiti"/>
+        <a:font script="Tibt" typeface="Microsoft Himalaya"/>
+        <a:font script="Thaa" typeface="MV Boli"/>
+        <a:font script="Deva" typeface="Mangal"/>
+        <a:font script="Telu" typeface="Gautami"/>
+        <a:font script="Taml" typeface="Latha"/>
+        <a:font script="Syrc" typeface="Estrangelo Edessa"/>
+        <a:font script="Orya" typeface="Kalinga"/>
+        <a:font script="Mlym" typeface="Kartika"/>
+        <a:font script="Laoo" typeface="DokChampa"/>
+        <a:font script="Sinh" typeface="Iskoola Pota"/>
+        <a:font script="Mong" typeface="Mongolian Baiti"/>
+        <a:font script="Viet" typeface="Arial"/>
+        <a:font script="Uigh" typeface="Microsoft Uighur"/>
+        <a:font script="Geor" typeface="Sylfaen"/>
+        <a:font script="Armn" typeface="Arial"/>
+        <a:font script="Bugi" typeface="Leelawadee UI"/>
+        <a:font script="Bopo" typeface="Microsoft JhengHei"/>
+        <a:font script="Java" typeface="Javanese Text"/>
+        <a:font script="Lisu" typeface="Segoe UI"/>
+        <a:font script="Mymr" typeface="Myanmar Text"/>
+        <a:font script="Nkoo" typeface="Ebrima"/>
+        <a:font script="Olck" typeface="Nirmala UI"/>
+        <a:font script="Osma" typeface="Ebrima"/>
+        <a:font script="Phag" typeface="Phagspa"/>
+        <a:font script="Syrn" typeface="Estrangelo Edessa"/>
+        <a:font script="Syrj" typeface="Estrangelo Edessa"/>
+        <a:font script="Syre" typeface="Estrangelo Edessa"/>
+        <a:font script="Sora" typeface="Nirmala UI"/>
+        <a:font script="Tale" typeface="Microsoft Tai Le"/>
+        <a:font script="Talu" typeface="Microsoft New Tai Lue"/>
+        <a:font script="Tfng" typeface="Ebrima"/>
+      </a:minorFont>
+    </a:fontScheme>
+    <a:fmtScheme name="Office">
+      <a:fillStyleLst>
+        <a:solidFill>
+          <a:schemeClr val="phClr"/>
+        </a:solidFill>
+        <a:gradFill rotWithShape="1">
+          <a:gsLst>
+            <a:gs pos="0">
+              <a:schemeClr val="phClr">
+                <a:lumMod val="110000"/>
+                <a:satMod val="105000"/>
+                <a:tint val="67000"/>
+              </a:schemeClr>
+            </a:gs>
+            <a:gs pos="50000">
+              <a:schemeClr val="phClr">
+                <a:lumMod val="105000"/>
+                <a:satMod val="103000"/>
+                <a:tint val="73000"/>
+              </a:schemeClr>
+            </a:gs>
+            <a:gs pos="100000">
+              <a:schemeClr val="phClr">
+                <a:lumMod val="105000"/>
+                <a:satMod val="109000"/>
+                <a:tint val="81000"/>
+              </a:schemeClr>
+            </a:gs>
+          </a:gsLst>
+          <a:lin ang="5400000" scaled="0"/>
+        </a:gradFill>
+        <a:gradFill rotWithShape="1">
+          <a:gsLst>
+            <a:gs pos="0">
+              <a:schemeClr val="phClr">
+                <a:satMod val="103000"/>
+                <a:lumMod val="102000"/>
+                <a:tint val="94000"/>
+              </a:schemeClr>
+            </a:gs>
+            <a:gs pos="50000">
+              <a:schemeClr val="phClr">
+                <a:satMod val="110000"/>
+                <a:lumMod val="100000"/>
+                <a:shade val="100000"/>
+              </a:schemeClr>
+            </a:gs>
+            <a:gs pos="100000">
+              <a:schemeClr val="phClr">
+                <a:lumMod val="99000"/>
+                <a:satMod val="120000"/>
+                <a:shade val="78000"/>
+              </a:schemeClr>
+            </a:gs>
+          </a:gsLst>
+          <a:lin ang="5400000" scaled="0"/>
+        </a:gradFill>
+      </a:fillStyleLst>
+      <a:lnStyleLst>
+        <a:ln w="6350" cap="flat" cmpd="sng" algn="ctr">
+          <a:solidFill>
+            <a:schemeClr val="phClr"/>
+          </a:solidFill>
+          <a:prstDash val="solid"/>
+          <a:miter lim="800000"/>
+        </a:ln>
+        <a:ln w="12700" cap="flat" cmpd="sng" algn="ctr">
+          <a:solidFill>
+            <a:schemeClr val="phClr"/>
+          </a:solidFill>
+          <a:prstDash val="solid"/>
+          <a:miter lim="800000"/>
+        </a:ln>
+        <a:ln w="19050" cap="flat" cmpd="sng" algn="ctr">
+          <a:solidFill>
+            <a:schemeClr val="phClr"/>
+          </a:solidFill>
+          <a:prstDash val="solid"/>
+          <a:miter lim="800000"/>
+        </a:ln>
+      </a:lnStyleLst>
+      <a:effectStyleLst>
+        <a:effectStyle>
+          <a:effectLst/>
+        </a:effectStyle>
+        <a:effectStyle>
+          <a:effectLst/>
+        </a:effectStyle>
+        <a:effectStyle>
+          <a:effectLst>
+            <a:outerShdw blurRad="57150" dist="19050" dir="5400000" algn="ctr" rotWithShape="0">
+              <a:srgbClr val="000000">
+                <a:alpha val="63000"/>
+              </a:srgbClr>
+            </a:outerShdw>
+          </a:effectLst>
+        </a:effectStyle>
+      </a:effectStyleLst>
+      <a:bgFillStyleLst>
+        <a:solidFill>
+          <a:schemeClr val="phClr"/>
+        </a:solidFill>
+        <a:solidFill>
+          <a:schemeClr val="phClr">
+            <a:tint val="95000"/>
+            <a:satMod val="170000"/>
+          </a:schemeClr>
+        </a:solidFill>
+        <a:gradFill rotWithShape="1">
+          <a:gsLst>
+            <a:gs pos="0">
+              <a:schemeClr val="phClr">
+                <a:tint val="93000"/>
+                <a:satMod val="150000"/>
+                <a:shade val="98000"/>
+                <a:lumMod val="102000"/>
+              </a:schemeClr>
+            </a:gs>
+            <a:gs pos="50000">
+              <a:schemeClr val="phClr">
+                <a:tint val="98000"/>
+                <a:satMod val="130000"/>
+                <a:shade val="90000"/>
+                <a:lumMod val="103000"/>
+              </a:schemeClr>
+            </a:gs>
+            <a:gs pos="100000">
+              <a:schemeClr val="phClr">
+                <a:shade val="63000"/>
+                <a:satMod val="120000"/>
+              </a:schemeClr>
+            </a:gs>
+          </a:gsLst>
+          <a:lin ang="5400000" scaled="0"/>
+        </a:gradFill>
+      </a:bgFillStyleLst>
+    </a:fmtScheme>
+  </a:themeElements>
+  <a:objectDefaults/>
+  <a:extraClrSchemeLst/>
+  <a:extLst>
+    <a:ext uri="{05A4C25C-085E-4340-85A3-A5531E510DB2}">
+      <thm15:themeFamily xmlns:thm15="http://schemas.microsoft.com/office/thememl/2012/main" name="Office Theme" id="{62F939B6-93AF-4DB8-9C6B-D6C7DFDC589F}" vid="{4A3C46E8-61CC-4603-A589-7422A47A8E4A}"/>
+    </a:ext>
+  </a:extLst>
+</a:theme>
 </file>